--- a/Topic_E/Exam_Practice/TE-L11_Speaking_Workshop_Topic_E_Integrated_Communication_Workshop.pptx
+++ b/Topic_E/Exam_Practice/TE-L11_Speaking_Workshop_Topic_E_Integrated_Communication_Workshop.pptx
@@ -615,7 +615,11 @@
           <a:lstStyle/>
           <a:p>
             <a:r>
-              <a:rPr lang="en-US" dirty="0"/>
+              <a:rPr lang="ar-SA" dirty="0">
+                <a:latin typeface="Amiri" pitchFamily="2" charset="-78"/>
+                <a:ea typeface="Amiri" pitchFamily="2" charset="-78"/>
+                <a:cs typeface="Amiri" pitchFamily="2" charset="-78"/>
+              </a:rPr>
               <a:t>ROLE PLAY C (Develop) — a mentoring session.
 SET-UP IN THE BREAKOUT ROOM: A = examiner (reads the left column ONLY — the questions, in order), B = candidate (sees the task column; Core may use the help column), C = observer (ticks the feedback checklist). 1 minute preparation, about 3 minutes speaking, 1 minute feedback, then rotate.
 Task ! is the unexpected question: in the exam the candidate has not seen it — the examiner should read it without warning.
@@ -707,7 +711,11 @@
           <a:lstStyle/>
           <a:p>
             <a:r>
-              <a:rPr lang="en-US" dirty="0"/>
+              <a:rPr lang="ar-SA" dirty="0">
+                <a:latin typeface="Amiri" pitchFamily="2" charset="-78"/>
+                <a:ea typeface="Amiri" pitchFamily="2" charset="-78"/>
+                <a:cs typeface="Amiri" pitchFamily="2" charset="-78"/>
+              </a:rPr>
               <a:t>ROLE PLAY D (Stretch) — a final interview.
 SET-UP IN THE BREAKOUT ROOM: A = examiner (reads the left column ONLY — the questions, in order), B = candidate (sees the task column; Core may use the help column), C = observer (ticks the feedback checklist). 1 minute preparation, about 3 minutes speaking, 1 minute feedback, then rotate.
 Task ! is the unexpected question: in the exam the candidate has not seen it — the examiner should read it without warning.
@@ -1243,7 +1251,11 @@
           <a:lstStyle/>
           <a:p>
             <a:r>
-              <a:rPr lang="en-US" dirty="0"/>
+              <a:rPr lang="ar-SA" dirty="0">
+                <a:latin typeface="Amiri" pitchFamily="2" charset="-78"/>
+                <a:ea typeface="Amiri" pitchFamily="2" charset="-78"/>
+                <a:cs typeface="Amiri" pitchFamily="2" charset="-78"/>
+              </a:rPr>
               <a:t>TOPIC CONVERSATION — Core. Examiner asks the questions in order and may add “لِمَاذَا؟ / هَلْ يُمْكِنُ أَنْ تَشْرَحَ أَكْثَرَ؟” to push for more. Candidate aims for one full sentence per question.
 </a:t>
             </a:r>
@@ -1332,7 +1344,11 @@
           <a:lstStyle/>
           <a:p>
             <a:r>
-              <a:rPr lang="en-US" dirty="0"/>
+              <a:rPr lang="ar-SA" dirty="0">
+                <a:latin typeface="Amiri" pitchFamily="2" charset="-78"/>
+                <a:ea typeface="Amiri" pitchFamily="2" charset="-78"/>
+                <a:cs typeface="Amiri" pitchFamily="2" charset="-78"/>
+              </a:rPr>
               <a:t>TOPIC CONVERSATION — Develop. Examiner asks the questions in order and may add “لِمَاذَا؟ / هَلْ يُمْكِنُ أَنْ تَشْرَحَ أَكْثَرَ؟” to push for more. Candidate aims for two or three sentences, with linkers and two or three time frames.
 </a:t>
             </a:r>
@@ -1421,7 +1437,11 @@
           <a:lstStyle/>
           <a:p>
             <a:r>
-              <a:rPr lang="en-US" dirty="0"/>
+              <a:rPr lang="ar-SA" dirty="0">
+                <a:latin typeface="Amiri" pitchFamily="2" charset="-78"/>
+                <a:ea typeface="Amiri" pitchFamily="2" charset="-78"/>
+                <a:cs typeface="Amiri" pitchFamily="2" charset="-78"/>
+              </a:rPr>
               <a:t>TOPIC CONVERSATION — Stretch. Examiner asks the questions in order and may add “لِمَاذَا؟ / هَلْ يُمْكِنُ أَنْ تَشْرَحَ أَكْثَرَ؟” to push for more. Candidate aims for a developed answer: opinion, balance, concession and a conditional.
 </a:t>
             </a:r>
@@ -1510,7 +1530,11 @@
           <a:lstStyle/>
           <a:p>
             <a:r>
-              <a:rPr lang="en-US" dirty="0"/>
+              <a:rPr lang="ar-SA" dirty="0">
+                <a:latin typeface="Amiri" pitchFamily="2" charset="-78"/>
+                <a:ea typeface="Amiri" pitchFamily="2" charset="-78"/>
+                <a:cs typeface="Amiri" pitchFamily="2" charset="-78"/>
+              </a:rPr>
               <a:t>WELCOME (1 min) — while students join.
 • Greet each student by name as they arrive: السَّلَامُ عَلَيْكُمْ. Take the register (Pastoral Tracker: attendance 0/1).
 • 2-MINUTE CHECK-IN (SEND training): a private chat to any student who seemed unsettled last lesson — “Are you okay today? 👍 / 👎”.
@@ -2224,7 +2248,11 @@
           <a:lstStyle/>
           <a:p>
             <a:r>
-              <a:rPr lang="en-US" dirty="0"/>
+              <a:rPr lang="ar-SA" dirty="0">
+                <a:latin typeface="Amiri" pitchFamily="2" charset="-78"/>
+                <a:ea typeface="Amiri" pitchFamily="2" charset="-78"/>
+                <a:cs typeface="Amiri" pitchFamily="2" charset="-78"/>
+              </a:rPr>
               <a:t>TEACH (3 min). Role play = precise and complete; conversation = develop. Choral repetition of the repair phrases. To a girl: تُعِيدِي.</a:t>
             </a:r>
             <a:endParaRPr lang="en-US" dirty="0"/>
@@ -2312,7 +2340,11 @@
           <a:lstStyle/>
           <a:p>
             <a:r>
-              <a:rPr lang="en-US" dirty="0"/>
+              <a:rPr lang="ar-SA" dirty="0">
+                <a:latin typeface="Amiri" pitchFamily="2" charset="-78"/>
+                <a:ea typeface="Amiri" pitchFamily="2" charset="-78"/>
+                <a:cs typeface="Amiri" pitchFamily="2" charset="-78"/>
+              </a:rPr>
               <a:t>LANGUAGE BANK (2 min) — the Topic E story in three tenses: كُنَّا نَحْتَفِلُ فِي … أَمَّا الآنَ فَنَحْتَفِلُ هُنَا … وَسَنُسَافِرُ … Link with أَوَّلًا · بِالإِضَافَةِ إِلَى ذٰلِكَ · مَعَ ذٰلِكَ · لِذٰلِكَ. Target: three linkers and three tenses in every developed answer.</a:t>
             </a:r>
             <a:endParaRPr lang="en-US" dirty="0"/>
@@ -2400,7 +2432,11 @@
           <a:lstStyle/>
           <a:p>
             <a:r>
-              <a:rPr lang="en-US" dirty="0"/>
+              <a:rPr lang="ar-SA" dirty="0">
+                <a:latin typeface="Amiri" pitchFamily="2" charset="-78"/>
+                <a:ea typeface="Amiri" pitchFamily="2" charset="-78"/>
+                <a:cs typeface="Amiri" pitchFamily="2" charset="-78"/>
+              </a:rPr>
               <a:t>LANGUAGE BANK (2 min) — the examiner may jump from languages to festivals to travel: have one sentence ready for each. Register: with a friend أَهْلًا · كَيْفَ حَالُكَ؟; with an official حَضْرَتُكَ · يَسُرُّنِي أَنْ · شُكْرًا عَلَى وَقْتِكُمْ.</a:t>
             </a:r>
             <a:endParaRPr lang="en-US" dirty="0"/>
@@ -2668,7 +2704,11 @@
           <a:lstStyle/>
           <a:p>
             <a:r>
-              <a:rPr lang="en-US" dirty="0"/>
+              <a:rPr lang="ar-SA" dirty="0">
+                <a:latin typeface="Amiri" pitchFamily="2" charset="-78"/>
+                <a:ea typeface="Amiri" pitchFamily="2" charset="-78"/>
+                <a:cs typeface="Amiri" pitchFamily="2" charset="-78"/>
+              </a:rPr>
               <a:t>ROLE PLAY B (Core+) — two registers.
 SET-UP IN THE BREAKOUT ROOM: A = examiner (reads the left column ONLY — the questions, in order), B = candidate (sees the task column; Core may use the help column), C = observer (ticks the feedback checklist). 1 minute preparation, about 3 minutes speaking, 1 minute feedback, then rotate.
 Task ! is the unexpected question: in the exam the candidate has not seen it — the examiner should read it without warning.
@@ -3156,6 +3196,7 @@
                   <a:srgbClr val="D4AF37"/>
                 </a:solidFill>
                 <a:latin typeface="Amiri" pitchFamily="2" charset="-78"/>
+                <a:ea typeface="Amiri" pitchFamily="2" charset="-78"/>
                 <a:cs typeface="Amiri" pitchFamily="2" charset="-78"/>
               </a:rPr>
               <a:t>م</a:t>
@@ -3362,6 +3403,7 @@
                   <a:srgbClr val="D4AF37"/>
                 </a:solidFill>
                 <a:latin typeface="Amiri" pitchFamily="2" charset="-78"/>
+                <a:ea typeface="Amiri" pitchFamily="2" charset="-78"/>
                 <a:cs typeface="Amiri" pitchFamily="2" charset="-78"/>
               </a:rPr>
               <a:t>وَرْشَةُ التَّحَدُّثِ — وَرْشَةُ التَّوَاصُلِ المُتَكَامِلِ</a:t>
@@ -3413,6 +3455,7 @@
                   <a:srgbClr val="C6D2E6"/>
                 </a:solidFill>
                 <a:latin typeface="Amiri" pitchFamily="2" charset="-78"/>
+                <a:ea typeface="Amiri" pitchFamily="2" charset="-78"/>
                 <a:cs typeface="Amiri" pitchFamily="2" charset="-78"/>
               </a:rPr>
               <a:t>أَوَّلًا</a:t>
@@ -3439,6 +3482,7 @@
                   <a:srgbClr val="C6D2E6"/>
                 </a:solidFill>
                 <a:latin typeface="Amiri" pitchFamily="2" charset="-78"/>
+                <a:ea typeface="Amiri" pitchFamily="2" charset="-78"/>
                 <a:cs typeface="Amiri" pitchFamily="2" charset="-78"/>
               </a:rPr>
               <a:t>بِالإِضَافَةِ إِلَى ذٰلِكَ</a:t>
@@ -3465,6 +3509,7 @@
                   <a:srgbClr val="C6D2E6"/>
                 </a:solidFill>
                 <a:latin typeface="Amiri" pitchFamily="2" charset="-78"/>
+                <a:ea typeface="Amiri" pitchFamily="2" charset="-78"/>
                 <a:cs typeface="Amiri" pitchFamily="2" charset="-78"/>
               </a:rPr>
               <a:t>مَعَ ذٰلِكَ</a:t>
@@ -3491,6 +3536,7 @@
                   <a:srgbClr val="C6D2E6"/>
                 </a:solidFill>
                 <a:latin typeface="Amiri" pitchFamily="2" charset="-78"/>
+                <a:ea typeface="Amiri" pitchFamily="2" charset="-78"/>
                 <a:cs typeface="Amiri" pitchFamily="2" charset="-78"/>
               </a:rPr>
               <a:t>لِذٰلِكَ</a:t>
@@ -3923,6 +3969,7 @@
                   <a:srgbClr val="D4AF37"/>
                 </a:solidFill>
                 <a:latin typeface="Amiri" pitchFamily="2" charset="-78"/>
+                <a:ea typeface="Amiri" pitchFamily="2" charset="-78"/>
                 <a:cs typeface="Amiri" pitchFamily="2" charset="-78"/>
               </a:rPr>
               <a:t>م</a:t>
@@ -4243,6 +4290,7 @@
                   <a:srgbClr val="8A6D1E"/>
                 </a:solidFill>
                 <a:latin typeface="Amiri" pitchFamily="2" charset="-78"/>
+                <a:ea typeface="Amiri" pitchFamily="2" charset="-78"/>
                 <a:cs typeface="Amiri" pitchFamily="2" charset="-78"/>
               </a:rPr>
               <a:t>رِحْلَتِي الثَّقَافِيَّةُ</a:t>
@@ -4523,6 +4571,7 @@
                   <a:srgbClr val="1B3B6F"/>
                 </a:solidFill>
                 <a:latin typeface="Amiri" pitchFamily="2" charset="-78"/>
+                <a:ea typeface="Amiri" pitchFamily="2" charset="-78"/>
                 <a:cs typeface="Amiri" pitchFamily="2" charset="-78"/>
               </a:rPr>
               <a:t>وُلِدْتُ فِي … ، وَكُنْتُ … أَمَّا الآنَ فَأَتَكَلَّمُ …</a:t>
@@ -4599,6 +4648,7 @@
                   <a:srgbClr val="1B3B6F"/>
                 </a:solidFill>
                 <a:latin typeface="Amiri" pitchFamily="2" charset="-78"/>
+                <a:ea typeface="Amiri" pitchFamily="2" charset="-78"/>
                 <a:cs typeface="Amiri" pitchFamily="2" charset="-78"/>
               </a:rPr>
               <a:t>حَدِّثْنِي عَنْ أَصْلِكَ وَلُغَاتِكَ.</a:t>
@@ -4702,6 +4752,7 @@
                   <a:srgbClr val="1B3B6F"/>
                 </a:solidFill>
                 <a:latin typeface="Amiri" pitchFamily="2" charset="-78"/>
+                <a:ea typeface="Amiri" pitchFamily="2" charset="-78"/>
                 <a:cs typeface="Amiri" pitchFamily="2" charset="-78"/>
               </a:rPr>
               <a:t>كُنَّا … أَمَّا هُنَا فَنَحْتَفِلُ … ؛ وَيُحْتَفَلُ …</a:t>
@@ -4778,6 +4829,7 @@
                   <a:srgbClr val="1B3B6F"/>
                 </a:solidFill>
                 <a:latin typeface="Amiri" pitchFamily="2" charset="-78"/>
+                <a:ea typeface="Amiri" pitchFamily="2" charset="-78"/>
                 <a:cs typeface="Amiri" pitchFamily="2" charset="-78"/>
               </a:rPr>
               <a:t>كَيْفَ تَحْتَفِلُونَ بِالأَعْيَادِ هُنَا؟</a:t>
@@ -4881,6 +4933,7 @@
                   <a:srgbClr val="1B3B6F"/>
                 </a:solidFill>
                 <a:latin typeface="Amiri" pitchFamily="2" charset="-78"/>
+                <a:ea typeface="Amiri" pitchFamily="2" charset="-78"/>
                 <a:cs typeface="Amiri" pitchFamily="2" charset="-78"/>
               </a:rPr>
               <a:t>أَصْعَبُ شَيْءٍ … بِسَبَبِ … ، مِمَّا …</a:t>
@@ -4957,6 +5010,7 @@
                   <a:srgbClr val="1B3B6F"/>
                 </a:solidFill>
                 <a:latin typeface="Amiri" pitchFamily="2" charset="-78"/>
+                <a:ea typeface="Amiri" pitchFamily="2" charset="-78"/>
                 <a:cs typeface="Amiri" pitchFamily="2" charset="-78"/>
               </a:rPr>
               <a:t>مَا الشَّيْءُ الَّذِي صَعُبَ عَلَيْكَ فِي البِدَايَةِ؟</a:t>
@@ -5060,6 +5114,7 @@
                   <a:srgbClr val="1B3B6F"/>
                 </a:solidFill>
                 <a:latin typeface="Amiri" pitchFamily="2" charset="-78"/>
+                <a:ea typeface="Amiri" pitchFamily="2" charset="-78"/>
                 <a:cs typeface="Amiri" pitchFamily="2" charset="-78"/>
               </a:rPr>
               <a:t>عِنْدَمَا … ، تَعَرَّفْتُ … ؛ وَمَعَ ذٰلِكَ …</a:t>
@@ -5136,6 +5191,7 @@
                   <a:srgbClr val="1B3B6F"/>
                 </a:solidFill>
                 <a:latin typeface="Amiri" pitchFamily="2" charset="-78"/>
+                <a:ea typeface="Amiri" pitchFamily="2" charset="-78"/>
                 <a:cs typeface="Amiri" pitchFamily="2" charset="-78"/>
               </a:rPr>
               <a:t>وَكَيْفَ تَغَيَّرَ ذٰلِكَ؟</a:t>
@@ -5239,6 +5295,7 @@
                   <a:srgbClr val="1B3B6F"/>
                 </a:solidFill>
                 <a:latin typeface="Amiri" pitchFamily="2" charset="-78"/>
+                <a:ea typeface="Amiri" pitchFamily="2" charset="-78"/>
                 <a:cs typeface="Amiri" pitchFamily="2" charset="-78"/>
               </a:rPr>
               <a:t>إِذَا سَافَرْتُ، فَسَأَصْطَحِبُ … لِكَيْ …</a:t>
@@ -5315,6 +5372,7 @@
                   <a:srgbClr val="1B3B6F"/>
                 </a:solidFill>
                 <a:latin typeface="Amiri" pitchFamily="2" charset="-78"/>
+                <a:ea typeface="Amiri" pitchFamily="2" charset="-78"/>
                 <a:cs typeface="Amiri" pitchFamily="2" charset="-78"/>
               </a:rPr>
               <a:t>وَإِذَا سَافَرْتَ إِلَى الجَزَائِرِ هٰذَا الصَّيْفَ؟</a:t>
@@ -5524,6 +5582,7 @@
                   <a:srgbClr val="D4AF37"/>
                 </a:solidFill>
                 <a:latin typeface="Amiri" pitchFamily="2" charset="-78"/>
+                <a:ea typeface="Amiri" pitchFamily="2" charset="-78"/>
                 <a:cs typeface="Amiri" pitchFamily="2" charset="-78"/>
               </a:rPr>
               <a:t>م</a:t>
@@ -5844,6 +5903,7 @@
                   <a:srgbClr val="8A6D1E"/>
                 </a:solidFill>
                 <a:latin typeface="Amiri" pitchFamily="2" charset="-78"/>
+                <a:ea typeface="Amiri" pitchFamily="2" charset="-78"/>
                 <a:cs typeface="Amiri" pitchFamily="2" charset="-78"/>
               </a:rPr>
               <a:t>مِنْحَةُ سَفِيرِ الشَّبَابِ</a:t>
@@ -6124,6 +6184,7 @@
                   <a:srgbClr val="1B3B6F"/>
                 </a:solidFill>
                 <a:latin typeface="Amiri" pitchFamily="2" charset="-78"/>
+                <a:ea typeface="Amiri" pitchFamily="2" charset="-78"/>
                 <a:cs typeface="Amiri" pitchFamily="2" charset="-78"/>
               </a:rPr>
               <a:t>يَسُرُّنِي أَنْ … ؛ وَالدَّلِيلُ أَنَّ …</a:t>
@@ -6200,6 +6261,7 @@
                   <a:srgbClr val="1B3B6F"/>
                 </a:solidFill>
                 <a:latin typeface="Amiri" pitchFamily="2" charset="-78"/>
+                <a:ea typeface="Amiri" pitchFamily="2" charset="-78"/>
                 <a:cs typeface="Amiri" pitchFamily="2" charset="-78"/>
               </a:rPr>
               <a:t>لِمَاذَا تَسْتَحِقُّ أَنْ تَكُونَ سَفِيرًا لِلشَّبَابِ؟</a:t>
@@ -6303,6 +6365,7 @@
                   <a:srgbClr val="1B3B6F"/>
                 </a:solidFill>
                 <a:latin typeface="Amiri" pitchFamily="2" charset="-78"/>
+                <a:ea typeface="Amiri" pitchFamily="2" charset="-78"/>
                 <a:cs typeface="Amiri" pitchFamily="2" charset="-78"/>
               </a:rPr>
               <a:t>هُوِيَّتِي لَيْسَتْ … بَلْ …</a:t>
@@ -6379,6 +6442,7 @@
                   <a:srgbClr val="1B3B6F"/>
                 </a:solidFill>
                 <a:latin typeface="Amiri" pitchFamily="2" charset="-78"/>
+                <a:ea typeface="Amiri" pitchFamily="2" charset="-78"/>
                 <a:cs typeface="Amiri" pitchFamily="2" charset="-78"/>
               </a:rPr>
               <a:t>كَيْفَ تَصِفُ هُوِيَّتَكَ؟</a:t>
@@ -6482,6 +6546,7 @@
                   <a:srgbClr val="1B3B6F"/>
                 </a:solidFill>
                 <a:latin typeface="Amiri" pitchFamily="2" charset="-78"/>
+                <a:ea typeface="Amiri" pitchFamily="2" charset="-78"/>
                 <a:cs typeface="Amiri" pitchFamily="2" charset="-78"/>
               </a:rPr>
               <a:t>صَحِيحٌ أَنَّ … غَيْرَ أَنَّ … لِذٰلِكَ …</a:t>
@@ -6558,6 +6623,7 @@
                   <a:srgbClr val="1B3B6F"/>
                 </a:solidFill>
                 <a:latin typeface="Amiri" pitchFamily="2" charset="-78"/>
+                <a:ea typeface="Amiri" pitchFamily="2" charset="-78"/>
                 <a:cs typeface="Amiri" pitchFamily="2" charset="-78"/>
               </a:rPr>
               <a:t>أَلَا تُهَدِّدُ العَوْلَمَةُ هُوِيَّاتِ الشُّعُوبِ؟</a:t>
@@ -6661,6 +6727,7 @@
                   <a:srgbClr val="1B3B6F"/>
                 </a:solidFill>
                 <a:latin typeface="Amiri" pitchFamily="2" charset="-78"/>
+                <a:ea typeface="Amiri" pitchFamily="2" charset="-78"/>
                 <a:cs typeface="Amiri" pitchFamily="2" charset="-78"/>
               </a:rPr>
               <a:t>إِذَا حَصَلْتُ عَلَيْهَا، فَسَأُنَظِّمُ … لِكَيْ …</a:t>
@@ -6737,6 +6804,7 @@
                   <a:srgbClr val="1B3B6F"/>
                 </a:solidFill>
                 <a:latin typeface="Amiri" pitchFamily="2" charset="-78"/>
+                <a:ea typeface="Amiri" pitchFamily="2" charset="-78"/>
                 <a:cs typeface="Amiri" pitchFamily="2" charset="-78"/>
               </a:rPr>
               <a:t>مَاذَا سَتَفْعَلُ إِذَا حَصَلْتَ عَلَى المِنْحَةِ؟</a:t>
@@ -6840,6 +6908,7 @@
                   <a:srgbClr val="1B3B6F"/>
                 </a:solidFill>
                 <a:latin typeface="Amiri" pitchFamily="2" charset="-78"/>
+                <a:ea typeface="Amiri" pitchFamily="2" charset="-78"/>
                 <a:cs typeface="Amiri" pitchFamily="2" charset="-78"/>
               </a:rPr>
               <a:t>لَوْ لَمْ أَحْصُلْ …، لَبَدَأْتُ … لٰكِنَّ …</a:t>
@@ -6916,6 +6985,7 @@
                   <a:srgbClr val="1B3B6F"/>
                 </a:solidFill>
                 <a:latin typeface="Amiri" pitchFamily="2" charset="-78"/>
+                <a:ea typeface="Amiri" pitchFamily="2" charset="-78"/>
                 <a:cs typeface="Amiri" pitchFamily="2" charset="-78"/>
               </a:rPr>
               <a:t>لَوْ لَمْ تَحْصُلْ عَلَيْهَا، هَلْ سَتَتَوَقَّفُ؟</a:t>
@@ -7125,6 +7195,7 @@
                   <a:srgbClr val="D4AF37"/>
                 </a:solidFill>
                 <a:latin typeface="Amiri" pitchFamily="2" charset="-78"/>
+                <a:ea typeface="Amiri" pitchFamily="2" charset="-78"/>
                 <a:cs typeface="Amiri" pitchFamily="2" charset="-78"/>
               </a:rPr>
               <a:t>م</a:t>
@@ -7445,6 +7516,7 @@
                   <a:srgbClr val="8A6D1E"/>
                 </a:solidFill>
                 <a:latin typeface="Amiri" pitchFamily="2" charset="-78"/>
+                <a:ea typeface="Amiri" pitchFamily="2" charset="-78"/>
                 <a:cs typeface="Amiri" pitchFamily="2" charset="-78"/>
               </a:rPr>
               <a:t>وَرَقَةُ المُلَاحِظِ</a:t>
@@ -8915,6 +8987,7 @@
                   <a:srgbClr val="D4AF37"/>
                 </a:solidFill>
                 <a:latin typeface="Amiri" pitchFamily="2" charset="-78"/>
+                <a:ea typeface="Amiri" pitchFamily="2" charset="-78"/>
                 <a:cs typeface="Amiri" pitchFamily="2" charset="-78"/>
               </a:rPr>
               <a:t>م</a:t>
@@ -9235,6 +9308,7 @@
                   <a:srgbClr val="8A6D1E"/>
                 </a:solidFill>
                 <a:latin typeface="Amiri" pitchFamily="2" charset="-78"/>
+                <a:ea typeface="Amiri" pitchFamily="2" charset="-78"/>
                 <a:cs typeface="Amiri" pitchFamily="2" charset="-78"/>
               </a:rPr>
               <a:t>نَمُوذَجُ الإِجَابَةِ</a:t>
@@ -9477,6 +9551,7 @@
                   <a:srgbClr val="1B3B6F"/>
                 </a:solidFill>
                 <a:latin typeface="Amiri" pitchFamily="2" charset="-78"/>
+                <a:ea typeface="Amiri" pitchFamily="2" charset="-78"/>
                 <a:cs typeface="Amiri" pitchFamily="2" charset="-78"/>
               </a:rPr>
               <a:t>مَسَاءَ النُّورِ! هٰذَا الجَنَاحُ لِلْجَزَائِرِ.</a:t>
@@ -9553,6 +9628,7 @@
                   <a:srgbClr val="1B3B6F"/>
                 </a:solidFill>
                 <a:latin typeface="Amiri" pitchFamily="2" charset="-78"/>
+                <a:ea typeface="Amiri" pitchFamily="2" charset="-78"/>
                 <a:cs typeface="Amiri" pitchFamily="2" charset="-78"/>
               </a:rPr>
               <a:t>مَسَاءَ الخَيْرِ! لِأَيِّ بَلَدٍ هٰذَا الجَنَاحُ؟</a:t>
@@ -9656,6 +9732,7 @@
                   <a:srgbClr val="1B3B6F"/>
                 </a:solidFill>
                 <a:latin typeface="Amiri" pitchFamily="2" charset="-78"/>
+                <a:ea typeface="Amiri" pitchFamily="2" charset="-78"/>
                 <a:cs typeface="Amiri" pitchFamily="2" charset="-78"/>
               </a:rPr>
               <a:t>يَتَكَلَّمُونَ العَرَبِيَّةَ وَالأَمَازِيغِيَّةَ، وَكَثِيرٌ مِنْهُمْ يَتَكَلَّمُ الفَرَنْسِيَّةَ.</a:t>
@@ -9732,6 +9809,7 @@
                   <a:srgbClr val="1B3B6F"/>
                 </a:solidFill>
                 <a:latin typeface="Amiri" pitchFamily="2" charset="-78"/>
+                <a:ea typeface="Amiri" pitchFamily="2" charset="-78"/>
                 <a:cs typeface="Amiri" pitchFamily="2" charset="-78"/>
               </a:rPr>
               <a:t>مَا اللُّغَاتُ الَّتِي يَتَكَلَّمُهَا النَّاسُ هُنَاكَ؟</a:t>
@@ -9835,6 +9913,7 @@
                   <a:srgbClr val="1B3B6F"/>
                 </a:solidFill>
                 <a:latin typeface="Amiri" pitchFamily="2" charset="-78"/>
+                <a:ea typeface="Amiri" pitchFamily="2" charset="-78"/>
                 <a:cs typeface="Amiri" pitchFamily="2" charset="-78"/>
               </a:rPr>
               <a:t>هٰذَا الكُسْكُسُ، وَهُوَ أَكْلَةٌ شَعْبِيَّةٌ لَذِيذَةٌ.</a:t>
@@ -9911,6 +9990,7 @@
                   <a:srgbClr val="1B3B6F"/>
                 </a:solidFill>
                 <a:latin typeface="Amiri" pitchFamily="2" charset="-78"/>
+                <a:ea typeface="Amiri" pitchFamily="2" charset="-78"/>
                 <a:cs typeface="Amiri" pitchFamily="2" charset="-78"/>
               </a:rPr>
               <a:t>وَمَا هٰذَا الطَّعَامُ؟</a:t>
@@ -10014,6 +10094,7 @@
                   <a:srgbClr val="1B3B6F"/>
                 </a:solidFill>
                 <a:latin typeface="Amiri" pitchFamily="2" charset="-78"/>
+                <a:ea typeface="Amiri" pitchFamily="2" charset="-78"/>
                 <a:cs typeface="Amiri" pitchFamily="2" charset="-78"/>
               </a:rPr>
               <a:t>نَعَمْ، فِي السَّاعَةِ السَّابِعَةِ عَلَى المَسْرَحِ.</a:t>
@@ -10090,6 +10171,7 @@
                   <a:srgbClr val="1B3B6F"/>
                 </a:solidFill>
                 <a:latin typeface="Amiri" pitchFamily="2" charset="-78"/>
+                <a:ea typeface="Amiri" pitchFamily="2" charset="-78"/>
                 <a:cs typeface="Amiri" pitchFamily="2" charset="-78"/>
               </a:rPr>
               <a:t>شُكْرًا! هَلْ عِنْدَكُمْ رَقْصٌ؟</a:t>
@@ -10193,6 +10275,7 @@
                   <a:srgbClr val="1B3B6F"/>
                 </a:solidFill>
                 <a:latin typeface="Amiri" pitchFamily="2" charset="-78"/>
+                <a:ea typeface="Amiri" pitchFamily="2" charset="-78"/>
                 <a:cs typeface="Amiri" pitchFamily="2" charset="-78"/>
               </a:rPr>
               <a:t>أَهَمُّ عِيدٍ عِيدُ الفِطْرِ، وَالنَّاسُ يَزُورُونَ أَقَارِبَهُمْ فِيهِ.</a:t>
@@ -10269,6 +10352,7 @@
                   <a:srgbClr val="1B3B6F"/>
                 </a:solidFill>
                 <a:latin typeface="Amiri" pitchFamily="2" charset="-78"/>
+                <a:ea typeface="Amiri" pitchFamily="2" charset="-78"/>
                 <a:cs typeface="Amiri" pitchFamily="2" charset="-78"/>
               </a:rPr>
               <a:t>مَا أَهَمُّ عِيدٍ فِي الجَزَائِرِ؟</a:t>
@@ -10478,6 +10562,7 @@
                   <a:srgbClr val="D4AF37"/>
                 </a:solidFill>
                 <a:latin typeface="Amiri" pitchFamily="2" charset="-78"/>
+                <a:ea typeface="Amiri" pitchFamily="2" charset="-78"/>
                 <a:cs typeface="Amiri" pitchFamily="2" charset="-78"/>
               </a:rPr>
               <a:t>م</a:t>
@@ -10798,6 +10883,7 @@
                   <a:srgbClr val="8A6D1E"/>
                 </a:solidFill>
                 <a:latin typeface="Amiri" pitchFamily="2" charset="-78"/>
+                <a:ea typeface="Amiri" pitchFamily="2" charset="-78"/>
                 <a:cs typeface="Amiri" pitchFamily="2" charset="-78"/>
               </a:rPr>
               <a:t>نَمُوذَجُ الإِجَابَةِ</a:t>
@@ -11040,6 +11126,7 @@
                   <a:srgbClr val="1B3B6F"/>
                 </a:solidFill>
                 <a:latin typeface="Amiri" pitchFamily="2" charset="-78"/>
+                <a:ea typeface="Amiri" pitchFamily="2" charset="-78"/>
                 <a:cs typeface="Amiri" pitchFamily="2" charset="-78"/>
               </a:rPr>
               <a:t>كَانَتْ رَائِعَةً! زُرْتُ البَتْرَاءَ وَالبَحْرَ المَيِّتَ.</a:t>
@@ -11116,6 +11203,7 @@
                   <a:srgbClr val="1B3B6F"/>
                 </a:solidFill>
                 <a:latin typeface="Amiri" pitchFamily="2" charset="-78"/>
+                <a:ea typeface="Amiri" pitchFamily="2" charset="-78"/>
                 <a:cs typeface="Amiri" pitchFamily="2" charset="-78"/>
               </a:rPr>
               <a:t>(صَدِيقٌ) أَهْلًا! كَيْفَ كَانَتْ رِحْلَتُكَ إِلَى الأُرْدُنِّ؟</a:t>
@@ -11219,6 +11307,7 @@
                   <a:srgbClr val="1B3B6F"/>
                 </a:solidFill>
                 <a:latin typeface="Amiri" pitchFamily="2" charset="-78"/>
+                <a:ea typeface="Amiri" pitchFamily="2" charset="-78"/>
                 <a:cs typeface="Amiri" pitchFamily="2" charset="-78"/>
               </a:rPr>
               <a:t>الأَكْلُ لَذِيذٌ جِدًّا، لٰكِنَّهُمْ يُعْطُونَكَ كَمِّيَّاتٍ كَبِيرَةً!</a:t>
@@ -11295,6 +11384,7 @@
                   <a:srgbClr val="1B3B6F"/>
                 </a:solidFill>
                 <a:latin typeface="Amiri" pitchFamily="2" charset="-78"/>
+                <a:ea typeface="Amiri" pitchFamily="2" charset="-78"/>
                 <a:cs typeface="Amiri" pitchFamily="2" charset="-78"/>
               </a:rPr>
               <a:t>وَالأَكْلُ؟</a:t>
@@ -11398,6 +11488,7 @@
                   <a:srgbClr val="1B3B6F"/>
                 </a:solidFill>
                 <a:latin typeface="Amiri" pitchFamily="2" charset="-78"/>
+                <a:ea typeface="Amiri" pitchFamily="2" charset="-78"/>
                 <a:cs typeface="Amiri" pitchFamily="2" charset="-78"/>
               </a:rPr>
               <a:t>مَسَاءَ النُّورِ. نَعَمْ، يَسُرُّنِي أَنْ أُسَاعِدَ فِي احْتِفَالِ العِيدِ القَادِمِ.</a:t>
@@ -11477,6 +11568,7 @@
                   <a:srgbClr val="1B3B6F"/>
                 </a:solidFill>
                 <a:latin typeface="Amiri" pitchFamily="2" charset="-78"/>
+                <a:ea typeface="Amiri" pitchFamily="2" charset="-78"/>
                 <a:cs typeface="Amiri" pitchFamily="2" charset="-78"/>
               </a:rPr>
               <a:t>(المُدِيرُ) مَسَاءَ الخَيْرِ. سَمِعْتُ أَنَّكَ تُرِيدُ أَنْ تَتَطَوَّعَ مَعَنَا.</a:t>
@@ -11580,6 +11672,7 @@
                   <a:srgbClr val="1B3B6F"/>
                 </a:solidFill>
                 <a:latin typeface="Amiri" pitchFamily="2" charset="-78"/>
+                <a:ea typeface="Amiri" pitchFamily="2" charset="-78"/>
                 <a:cs typeface="Amiri" pitchFamily="2" charset="-78"/>
               </a:rPr>
               <a:t>أَسْتَطِيعُ أَنْ أُتَرْجِمَ لِلضُّيُوفِ وَأُسَاعِدَ فِي التَّنْظِيمِ. هَلْ يُمْكِنُنِي أَنْ أُحْضِرَ صَدِيقًا أَيْضًا؟</a:t>
@@ -11656,6 +11749,7 @@
                   <a:srgbClr val="1B3B6F"/>
                 </a:solidFill>
                 <a:latin typeface="Amiri" pitchFamily="2" charset="-78"/>
+                <a:ea typeface="Amiri" pitchFamily="2" charset="-78"/>
                 <a:cs typeface="Amiri" pitchFamily="2" charset="-78"/>
               </a:rPr>
               <a:t>مَا الَّذِي تَسْتَطِيعُ أَنْ تُقَدِّمَهُ؟</a:t>
@@ -11759,6 +11853,7 @@
                   <a:srgbClr val="1B3B6F"/>
                 </a:solidFill>
                 <a:latin typeface="Amiri" pitchFamily="2" charset="-78"/>
+                <a:ea typeface="Amiri" pitchFamily="2" charset="-78"/>
                 <a:cs typeface="Amiri" pitchFamily="2" charset="-78"/>
               </a:rPr>
               <a:t>لِأَنَّ الاحْتِفَالَ يَجْمَعُ النَّاسَ مِنْ ثَقَافَاتٍ مُخْتَلِفَةٍ؛ وَسَأَطْلُبُ مِنْ أُسْرَتِي أَنْ تَطْبُخَ طَبَقًا أُرْدُنِيًّا.</a:t>
@@ -11835,6 +11930,7 @@
                   <a:srgbClr val="1B3B6F"/>
                 </a:solidFill>
                 <a:latin typeface="Amiri" pitchFamily="2" charset="-78"/>
+                <a:ea typeface="Amiri" pitchFamily="2" charset="-78"/>
                 <a:cs typeface="Amiri" pitchFamily="2" charset="-78"/>
               </a:rPr>
               <a:t>طَبْعًا. لِمَاذَا يُهِمُّكَ هٰذَا العَمَلُ؟</a:t>
@@ -12044,6 +12140,7 @@
                   <a:srgbClr val="D4AF37"/>
                 </a:solidFill>
                 <a:latin typeface="Amiri" pitchFamily="2" charset="-78"/>
+                <a:ea typeface="Amiri" pitchFamily="2" charset="-78"/>
                 <a:cs typeface="Amiri" pitchFamily="2" charset="-78"/>
               </a:rPr>
               <a:t>م</a:t>
@@ -12364,6 +12461,7 @@
                   <a:srgbClr val="8A6D1E"/>
                 </a:solidFill>
                 <a:latin typeface="Amiri" pitchFamily="2" charset="-78"/>
+                <a:ea typeface="Amiri" pitchFamily="2" charset="-78"/>
                 <a:cs typeface="Amiri" pitchFamily="2" charset="-78"/>
               </a:rPr>
               <a:t>نَمُوذَجُ الإِجَابَةِ</a:t>
@@ -12606,6 +12704,7 @@
                   <a:srgbClr val="1B3B6F"/>
                 </a:solidFill>
                 <a:latin typeface="Amiri" pitchFamily="2" charset="-78"/>
+                <a:ea typeface="Amiri" pitchFamily="2" charset="-78"/>
                 <a:cs typeface="Amiri" pitchFamily="2" charset="-78"/>
               </a:rPr>
               <a:t>وُلِدْتُ فِي الجَزَائِرِ، وَكُنْتُ أَتَكَلَّمُ العَرَبِيَّةَ وَالفَرَنْسِيَّةَ فَقَطْ، أَمَّا الآنَ فَأَتَكَلَّمُ الإِنْجْلِيزِيَّةَ بِطَلَاقَةٍ أَيْضًا.</a:t>
@@ -12682,6 +12781,7 @@
                   <a:srgbClr val="1B3B6F"/>
                 </a:solidFill>
                 <a:latin typeface="Amiri" pitchFamily="2" charset="-78"/>
+                <a:ea typeface="Amiri" pitchFamily="2" charset="-78"/>
                 <a:cs typeface="Amiri" pitchFamily="2" charset="-78"/>
               </a:rPr>
               <a:t>حَدِّثْنِي عَنْ أَصْلِكَ وَلُغَاتِكَ.</a:t>
@@ -12785,6 +12885,7 @@
                   <a:srgbClr val="1B3B6F"/>
                 </a:solidFill>
                 <a:latin typeface="Amiri" pitchFamily="2" charset="-78"/>
+                <a:ea typeface="Amiri" pitchFamily="2" charset="-78"/>
                 <a:cs typeface="Amiri" pitchFamily="2" charset="-78"/>
               </a:rPr>
               <a:t>كُنَّا نَحْتَفِلُ مَعَ كُلِّ العَائِلَةِ فِي قَسَنْطِينَةَ، أَمَّا هُنَا فَنَحْتَفِلُ مَعَ الجِيرَانِ؛ وَيُحْتَفَلُ بِالعِيدِ فِي حَدِيقَةِ المَدِينَةِ.</a:t>
@@ -12861,6 +12962,7 @@
                   <a:srgbClr val="1B3B6F"/>
                 </a:solidFill>
                 <a:latin typeface="Amiri" pitchFamily="2" charset="-78"/>
+                <a:ea typeface="Amiri" pitchFamily="2" charset="-78"/>
                 <a:cs typeface="Amiri" pitchFamily="2" charset="-78"/>
               </a:rPr>
               <a:t>كَيْفَ تَحْتَفِلُونَ بِالأَعْيَادِ هُنَا؟</a:t>
@@ -12964,6 +13066,7 @@
                   <a:srgbClr val="1B3B6F"/>
                 </a:solidFill>
                 <a:latin typeface="Amiri" pitchFamily="2" charset="-78"/>
+                <a:ea typeface="Amiri" pitchFamily="2" charset="-78"/>
                 <a:cs typeface="Amiri" pitchFamily="2" charset="-78"/>
               </a:rPr>
               <a:t>أَصْعَبُ شَيْءٍ كَانَ اخْتِلَافَ العَادَاتِ بِسَبَبِ اللُّغَةِ وَالطَّقْسِ، مِمَّا جَعَلَنِي أَشْعُرُ بِالوَحْدَةِ أَشْهُرًا.</a:t>
@@ -13040,6 +13143,7 @@
                   <a:srgbClr val="1B3B6F"/>
                 </a:solidFill>
                 <a:latin typeface="Amiri" pitchFamily="2" charset="-78"/>
+                <a:ea typeface="Amiri" pitchFamily="2" charset="-78"/>
                 <a:cs typeface="Amiri" pitchFamily="2" charset="-78"/>
               </a:rPr>
               <a:t>مَا الشَّيْءُ الَّذِي صَعُبَ عَلَيْكَ فِي البِدَايَةِ؟</a:t>
@@ -13143,6 +13247,7 @@
                   <a:srgbClr val="1B3B6F"/>
                 </a:solidFill>
                 <a:latin typeface="Amiri" pitchFamily="2" charset="-78"/>
+                <a:ea typeface="Amiri" pitchFamily="2" charset="-78"/>
                 <a:cs typeface="Amiri" pitchFamily="2" charset="-78"/>
               </a:rPr>
               <a:t>عِنْدَمَا شَارَكْتُ فِي نَادِي الثَّقَافَاتِ، تَعَرَّفْتُ عَلَى أَصْدِقَاءَ مِنْ عِشْرِينَ بَلَدًا، وَمَعَ ذٰلِكَ لَمْ أَنْسَ جُذُورِي.</a:t>
@@ -13219,6 +13324,7 @@
                   <a:srgbClr val="1B3B6F"/>
                 </a:solidFill>
                 <a:latin typeface="Amiri" pitchFamily="2" charset="-78"/>
+                <a:ea typeface="Amiri" pitchFamily="2" charset="-78"/>
                 <a:cs typeface="Amiri" pitchFamily="2" charset="-78"/>
               </a:rPr>
               <a:t>وَكَيْفَ تَغَيَّرَ ذٰلِكَ؟</a:t>
@@ -13322,6 +13428,7 @@
                   <a:srgbClr val="1B3B6F"/>
                 </a:solidFill>
                 <a:latin typeface="Amiri" pitchFamily="2" charset="-78"/>
+                <a:ea typeface="Amiri" pitchFamily="2" charset="-78"/>
                 <a:cs typeface="Amiri" pitchFamily="2" charset="-78"/>
               </a:rPr>
               <a:t>إِذَا سَافَرْتُ، فَسَأَصْطَحِبُ صَدِيقِي الإِنْجْلِيزِيَّ، لِكَيْ يَرَى بِنَفْسِهِ كَرَمَ أَهْلِنَا.</a:t>
@@ -13398,6 +13505,7 @@
                   <a:srgbClr val="1B3B6F"/>
                 </a:solidFill>
                 <a:latin typeface="Amiri" pitchFamily="2" charset="-78"/>
+                <a:ea typeface="Amiri" pitchFamily="2" charset="-78"/>
                 <a:cs typeface="Amiri" pitchFamily="2" charset="-78"/>
               </a:rPr>
               <a:t>وَإِذَا سَافَرْتَ إِلَى الجَزَائِرِ هٰذَا الصَّيْفَ؟</a:t>
@@ -13607,6 +13715,7 @@
                   <a:srgbClr val="D4AF37"/>
                 </a:solidFill>
                 <a:latin typeface="Amiri" pitchFamily="2" charset="-78"/>
+                <a:ea typeface="Amiri" pitchFamily="2" charset="-78"/>
                 <a:cs typeface="Amiri" pitchFamily="2" charset="-78"/>
               </a:rPr>
               <a:t>م</a:t>
@@ -13927,6 +14036,7 @@
                   <a:srgbClr val="8A6D1E"/>
                 </a:solidFill>
                 <a:latin typeface="Amiri" pitchFamily="2" charset="-78"/>
+                <a:ea typeface="Amiri" pitchFamily="2" charset="-78"/>
                 <a:cs typeface="Amiri" pitchFamily="2" charset="-78"/>
               </a:rPr>
               <a:t>نَمُوذَجُ الإِجَابَةِ</a:t>
@@ -14172,6 +14282,7 @@
                   <a:srgbClr val="1B3B6F"/>
                 </a:solidFill>
                 <a:latin typeface="Amiri" pitchFamily="2" charset="-78"/>
+                <a:ea typeface="Amiri" pitchFamily="2" charset="-78"/>
                 <a:cs typeface="Amiri" pitchFamily="2" charset="-78"/>
               </a:rPr>
               <a:t>يَسُرُّنِي أَنْ أَكُونَ هُنَا. أَرَى أَنَّنِي أَجْمَعُ بَيْنَ ثَلَاثِ ثَقَافَاتٍ وَثَلَاثِ لُغَاتٍ؛ وَالدَّلِيلُ أَنَّنِي أَسَّسْتُ نَادِيًا لِلتَّبَادُلِ اللُّغَوِيِّ يَضُمُّ اليَوْمَ أَرْبَعِينَ طَالِبًا.</a:t>
@@ -14248,6 +14359,7 @@
                   <a:srgbClr val="1B3B6F"/>
                 </a:solidFill>
                 <a:latin typeface="Amiri" pitchFamily="2" charset="-78"/>
+                <a:ea typeface="Amiri" pitchFamily="2" charset="-78"/>
                 <a:cs typeface="Amiri" pitchFamily="2" charset="-78"/>
               </a:rPr>
               <a:t>لِمَاذَا تَسْتَحِقُّ أَنْ تَكُونَ سَفِيرًا لِلشَّبَابِ؟</a:t>
@@ -14351,6 +14463,7 @@
                   <a:srgbClr val="1B3B6F"/>
                 </a:solidFill>
                 <a:latin typeface="Amiri" pitchFamily="2" charset="-78"/>
+                <a:ea typeface="Amiri" pitchFamily="2" charset="-78"/>
                 <a:cs typeface="Amiri" pitchFamily="2" charset="-78"/>
               </a:rPr>
               <a:t>هُوِيَّتِي لَيْسَتْ صُنْدُوقًا وَاحِدًا، بَلْ شَجَرَةٌ جُذُورُهَا فِي الجَزَائِرِ، وَأَغْصَانُهَا فِي بَرِيطَانْيَا، وَثِمَارُهَا لِلْجَمِيعِ.</a:t>
@@ -14427,6 +14540,7 @@
                   <a:srgbClr val="1B3B6F"/>
                 </a:solidFill>
                 <a:latin typeface="Amiri" pitchFamily="2" charset="-78"/>
+                <a:ea typeface="Amiri" pitchFamily="2" charset="-78"/>
                 <a:cs typeface="Amiri" pitchFamily="2" charset="-78"/>
               </a:rPr>
               <a:t>كَيْفَ تَصِفُ هُوِيَّتَكَ؟</a:t>
@@ -14533,6 +14647,7 @@
                   <a:srgbClr val="1B3B6F"/>
                 </a:solidFill>
                 <a:latin typeface="Amiri" pitchFamily="2" charset="-78"/>
+                <a:ea typeface="Amiri" pitchFamily="2" charset="-78"/>
                 <a:cs typeface="Amiri" pitchFamily="2" charset="-78"/>
               </a:rPr>
               <a:t>صَحِيحٌ أَنَّهَا تَنْشُرُ ثَقَافَةً وَاحِدَةً أَحْيَانًا، غَيْرَ أَنَّهَا تُتِيحُ لَنَا أَيْضًا أَنْ نُعَرِّفَ العَالَمَ بِتُرَاثِنَا؛ لِذٰلِكَ المُهِمُّ أَنْ نَكُونَ مُنْتِجِينَ لِلثَّقَافَةِ لَا مُسْتَهْلِكِينَ فَقَطْ.</a:t>
@@ -14609,6 +14724,7 @@
                   <a:srgbClr val="1B3B6F"/>
                 </a:solidFill>
                 <a:latin typeface="Amiri" pitchFamily="2" charset="-78"/>
+                <a:ea typeface="Amiri" pitchFamily="2" charset="-78"/>
                 <a:cs typeface="Amiri" pitchFamily="2" charset="-78"/>
               </a:rPr>
               <a:t>أَلَا تُهَدِّدُ العَوْلَمَةُ هُوِيَّاتِ الشُّعُوبِ؟</a:t>
@@ -14712,6 +14828,7 @@
                   <a:srgbClr val="1B3B6F"/>
                 </a:solidFill>
                 <a:latin typeface="Amiri" pitchFamily="2" charset="-78"/>
+                <a:ea typeface="Amiri" pitchFamily="2" charset="-78"/>
                 <a:cs typeface="Amiri" pitchFamily="2" charset="-78"/>
               </a:rPr>
               <a:t>إِذَا حَصَلْتُ عَلَيْهَا، فَسَأُنَظِّمُ تَبَادُلًا بَيْنَ مَدْرَسَتِي وَمَدْرَسَةٍ فِي وَهْرَانَ، لِكَيْ يَكْتَشِفَ الطُّلَّابُ أَنَّ مَا يَجْمَعُهُمْ أَكْثَرُ مِمَّا يُفَرِّقُهُمْ.</a:t>
@@ -14788,6 +14905,7 @@
                   <a:srgbClr val="1B3B6F"/>
                 </a:solidFill>
                 <a:latin typeface="Amiri" pitchFamily="2" charset="-78"/>
+                <a:ea typeface="Amiri" pitchFamily="2" charset="-78"/>
                 <a:cs typeface="Amiri" pitchFamily="2" charset="-78"/>
               </a:rPr>
               <a:t>مَاذَا سَتَفْعَلُ إِذَا حَصَلْتَ عَلَى المِنْحَةِ؟</a:t>
@@ -14891,6 +15009,7 @@
                   <a:srgbClr val="1B3B6F"/>
                 </a:solidFill>
                 <a:latin typeface="Amiri" pitchFamily="2" charset="-78"/>
+                <a:ea typeface="Amiri" pitchFamily="2" charset="-78"/>
                 <a:cs typeface="Amiri" pitchFamily="2" charset="-78"/>
               </a:rPr>
               <a:t>لَوْ لَمْ أَحْصُلْ عَلَيْهَا، لَبَدَأْتُ بِمَشْرُوعٍ أَصْغَرَ عَلَى الإِنْتَرْنِتِ؛ فَالطَّرِيقُ سَيَكُونُ أَبْطَأَ، لٰكِنَّ الهَدَفَ لَنْ يَتَغَيَّرَ.</a:t>
@@ -14967,6 +15086,7 @@
                   <a:srgbClr val="1B3B6F"/>
                 </a:solidFill>
                 <a:latin typeface="Amiri" pitchFamily="2" charset="-78"/>
+                <a:ea typeface="Amiri" pitchFamily="2" charset="-78"/>
                 <a:cs typeface="Amiri" pitchFamily="2" charset="-78"/>
               </a:rPr>
               <a:t>لَوْ لَمْ تَحْصُلْ عَلَيْهَا، هَلْ سَتَتَوَقَّفُ؟</a:t>
@@ -15176,6 +15296,7 @@
                   <a:srgbClr val="D4AF37"/>
                 </a:solidFill>
                 <a:latin typeface="Amiri" pitchFamily="2" charset="-78"/>
+                <a:ea typeface="Amiri" pitchFamily="2" charset="-78"/>
                 <a:cs typeface="Amiri" pitchFamily="2" charset="-78"/>
               </a:rPr>
               <a:t>م</a:t>
@@ -15496,6 +15617,7 @@
                   <a:srgbClr val="8A6D1E"/>
                 </a:solidFill>
                 <a:latin typeface="Amiri" pitchFamily="2" charset="-78"/>
+                <a:ea typeface="Amiri" pitchFamily="2" charset="-78"/>
                 <a:cs typeface="Amiri" pitchFamily="2" charset="-78"/>
               </a:rPr>
               <a:t>أَنَا وَالعَالَمُ</a:t>
@@ -15776,6 +15898,7 @@
                   <a:srgbClr val="1B3B6F"/>
                 </a:solidFill>
                 <a:latin typeface="Amiri" pitchFamily="2" charset="-78"/>
+                <a:ea typeface="Amiri" pitchFamily="2" charset="-78"/>
                 <a:cs typeface="Amiri" pitchFamily="2" charset="-78"/>
               </a:rPr>
               <a:t>أُسْرَتِي مِنْ …</a:t>
@@ -15852,6 +15975,7 @@
                   <a:srgbClr val="1B3B6F"/>
                 </a:solidFill>
                 <a:latin typeface="Amiri" pitchFamily="2" charset="-78"/>
+                <a:ea typeface="Amiri" pitchFamily="2" charset="-78"/>
                 <a:cs typeface="Amiri" pitchFamily="2" charset="-78"/>
               </a:rPr>
               <a:t>مِنْ أَيْنَ أُسْرَتُكَ؟</a:t>
@@ -16020,6 +16144,7 @@
                   <a:srgbClr val="1B3B6F"/>
                 </a:solidFill>
                 <a:latin typeface="Amiri" pitchFamily="2" charset="-78"/>
+                <a:ea typeface="Amiri" pitchFamily="2" charset="-78"/>
                 <a:cs typeface="Amiri" pitchFamily="2" charset="-78"/>
               </a:rPr>
               <a:t>أَتَكَلَّمُ … لُغَاتٍ</a:t>
@@ -16096,6 +16221,7 @@
                   <a:srgbClr val="1B3B6F"/>
                 </a:solidFill>
                 <a:latin typeface="Amiri" pitchFamily="2" charset="-78"/>
+                <a:ea typeface="Amiri" pitchFamily="2" charset="-78"/>
                 <a:cs typeface="Amiri" pitchFamily="2" charset="-78"/>
               </a:rPr>
               <a:t>كَمْ لُغَةً تَتَكَلَّمُ؟</a:t>
@@ -16264,6 +16390,7 @@
                   <a:srgbClr val="1B3B6F"/>
                 </a:solidFill>
                 <a:latin typeface="Amiri" pitchFamily="2" charset="-78"/>
+                <a:ea typeface="Amiri" pitchFamily="2" charset="-78"/>
                 <a:cs typeface="Amiri" pitchFamily="2" charset="-78"/>
               </a:rPr>
               <a:t>أَكْلَتُنَا الشَّعْبِيَّةُ …</a:t>
@@ -16340,6 +16467,7 @@
                   <a:srgbClr val="1B3B6F"/>
                 </a:solidFill>
                 <a:latin typeface="Amiri" pitchFamily="2" charset="-78"/>
+                <a:ea typeface="Amiri" pitchFamily="2" charset="-78"/>
                 <a:cs typeface="Amiri" pitchFamily="2" charset="-78"/>
               </a:rPr>
               <a:t>مَا أَكْلَتُكُمُ الشَّعْبِيَّةُ؟</a:t>
@@ -16508,6 +16636,7 @@
                   <a:srgbClr val="1B3B6F"/>
                 </a:solidFill>
                 <a:latin typeface="Amiri" pitchFamily="2" charset="-78"/>
+                <a:ea typeface="Amiri" pitchFamily="2" charset="-78"/>
                 <a:cs typeface="Amiri" pitchFamily="2" charset="-78"/>
               </a:rPr>
               <a:t>عِيدِي المُفَضَّلُ … لِأَنَّ …</a:t>
@@ -16584,6 +16713,7 @@
                   <a:srgbClr val="1B3B6F"/>
                 </a:solidFill>
                 <a:latin typeface="Amiri" pitchFamily="2" charset="-78"/>
+                <a:ea typeface="Amiri" pitchFamily="2" charset="-78"/>
                 <a:cs typeface="Amiri" pitchFamily="2" charset="-78"/>
               </a:rPr>
               <a:t>مَا عِيدُكَ المُفَضَّلُ؟</a:t>
@@ -16752,6 +16882,7 @@
                   <a:srgbClr val="1B3B6F"/>
                 </a:solidFill>
                 <a:latin typeface="Amiri" pitchFamily="2" charset="-78"/>
+                <a:ea typeface="Amiri" pitchFamily="2" charset="-78"/>
                 <a:cs typeface="Amiri" pitchFamily="2" charset="-78"/>
               </a:rPr>
               <a:t>أُرِيدُ أَنْ أُسَافِرَ إِلَى …</a:t>
@@ -16828,6 +16959,7 @@
                   <a:srgbClr val="1B3B6F"/>
                 </a:solidFill>
                 <a:latin typeface="Amiri" pitchFamily="2" charset="-78"/>
+                <a:ea typeface="Amiri" pitchFamily="2" charset="-78"/>
                 <a:cs typeface="Amiri" pitchFamily="2" charset="-78"/>
               </a:rPr>
               <a:t>أَيْنَ تُرِيدُ أَنْ تُسَافِرَ؟</a:t>
@@ -16982,6 +17114,7 @@
                   <a:srgbClr val="1B3B6F"/>
                 </a:solidFill>
                 <a:latin typeface="Amiri" pitchFamily="2" charset="-78"/>
+                <a:ea typeface="Amiri" pitchFamily="2" charset="-78"/>
                 <a:cs typeface="Amiri" pitchFamily="2" charset="-78"/>
               </a:rPr>
               <a:t>عَفْوًا، هَلْ يُمْكِنُ أَنْ تُعِيدَ السُّؤَالَ؟</a:t>
@@ -17115,6 +17248,7 @@
                   <a:srgbClr val="D4AF37"/>
                 </a:solidFill>
                 <a:latin typeface="Amiri" pitchFamily="2" charset="-78"/>
+                <a:ea typeface="Amiri" pitchFamily="2" charset="-78"/>
                 <a:cs typeface="Amiri" pitchFamily="2" charset="-78"/>
               </a:rPr>
               <a:t>م</a:t>
@@ -17435,6 +17569,7 @@
                   <a:srgbClr val="8A6D1E"/>
                 </a:solidFill>
                 <a:latin typeface="Amiri" pitchFamily="2" charset="-78"/>
+                <a:ea typeface="Amiri" pitchFamily="2" charset="-78"/>
                 <a:cs typeface="Amiri" pitchFamily="2" charset="-78"/>
               </a:rPr>
               <a:t>ثَقَافَتِي وَالعَالَمُ</a:t>
@@ -17715,6 +17850,7 @@
                   <a:srgbClr val="1B3B6F"/>
                 </a:solidFill>
                 <a:latin typeface="Amiri" pitchFamily="2" charset="-78"/>
+                <a:ea typeface="Amiri" pitchFamily="2" charset="-78"/>
                 <a:cs typeface="Amiri" pitchFamily="2" charset="-78"/>
               </a:rPr>
               <a:t>كُنْتُ … أَمَّا الآنَ فَأَدْرُسُ … وَسَأَتَعَلَّمُ …</a:t>
@@ -17791,6 +17927,7 @@
                   <a:srgbClr val="1B3B6F"/>
                 </a:solidFill>
                 <a:latin typeface="Amiri" pitchFamily="2" charset="-78"/>
+                <a:ea typeface="Amiri" pitchFamily="2" charset="-78"/>
                 <a:cs typeface="Amiri" pitchFamily="2" charset="-78"/>
               </a:rPr>
               <a:t>كَيْفَ تَغَيَّرَتْ لُغَاتُكَ مُنْذُ طُفُولَتِكَ؟</a:t>
@@ -17894,6 +18031,7 @@
                   <a:srgbClr val="1B3B6F"/>
                 </a:solidFill>
                 <a:latin typeface="Amiri" pitchFamily="2" charset="-78"/>
+                <a:ea typeface="Amiri" pitchFamily="2" charset="-78"/>
                 <a:cs typeface="Amiri" pitchFamily="2" charset="-78"/>
               </a:rPr>
               <a:t>أَوَّلًا … بِالإِضَافَةِ إِلَى ذٰلِكَ …</a:t>
@@ -17970,6 +18108,7 @@
                   <a:srgbClr val="1B3B6F"/>
                 </a:solidFill>
                 <a:latin typeface="Amiri" pitchFamily="2" charset="-78"/>
+                <a:ea typeface="Amiri" pitchFamily="2" charset="-78"/>
                 <a:cs typeface="Amiri" pitchFamily="2" charset="-78"/>
               </a:rPr>
               <a:t>صِفْ عَادَةً مِنْ عَادَاتِ الضِّيَافَةِ فِي ثَقَافَتِكَ.</a:t>
@@ -18073,6 +18212,7 @@
                   <a:srgbClr val="1B3B6F"/>
                 </a:solidFill>
                 <a:latin typeface="Amiri" pitchFamily="2" charset="-78"/>
+                <a:ea typeface="Amiri" pitchFamily="2" charset="-78"/>
                 <a:cs typeface="Amiri" pitchFamily="2" charset="-78"/>
               </a:rPr>
               <a:t>زُرْتُ … ؛ فَتَعَلَّمْتُ … وَمَعَ ذٰلِكَ …</a:t>
@@ -18149,6 +18289,7 @@
                   <a:srgbClr val="1B3B6F"/>
                 </a:solidFill>
                 <a:latin typeface="Amiri" pitchFamily="2" charset="-78"/>
+                <a:ea typeface="Amiri" pitchFamily="2" charset="-78"/>
                 <a:cs typeface="Amiri" pitchFamily="2" charset="-78"/>
               </a:rPr>
               <a:t>حَدِّثْنِي عَنْ رِحْلَةٍ تَعَلَّمْتَ مِنْهَا شَيْئًا.</a:t>
@@ -18252,6 +18393,7 @@
                   <a:srgbClr val="1B3B6F"/>
                 </a:solidFill>
                 <a:latin typeface="Amiri" pitchFamily="2" charset="-78"/>
+                <a:ea typeface="Amiri" pitchFamily="2" charset="-78"/>
                 <a:cs typeface="Amiri" pitchFamily="2" charset="-78"/>
               </a:rPr>
               <a:t>… أَكْبَرُ مِنْ … بَيْنَمَا يُحْتَفَلُ …</a:t>
@@ -18328,6 +18470,7 @@
                   <a:srgbClr val="1B3B6F"/>
                 </a:solidFill>
                 <a:latin typeface="Amiri" pitchFamily="2" charset="-78"/>
+                <a:ea typeface="Amiri" pitchFamily="2" charset="-78"/>
                 <a:cs typeface="Amiri" pitchFamily="2" charset="-78"/>
               </a:rPr>
               <a:t>قَارِنْ بَيْنَ احْتِفَالٍ هُنَا وَاحْتِفَالٍ فِي بَلَدِ أُسْرَتِكَ.</a:t>
@@ -18431,6 +18574,7 @@
                   <a:srgbClr val="1B3B6F"/>
                 </a:solidFill>
                 <a:latin typeface="Amiri" pitchFamily="2" charset="-78"/>
+                <a:ea typeface="Amiri" pitchFamily="2" charset="-78"/>
                 <a:cs typeface="Amiri" pitchFamily="2" charset="-78"/>
               </a:rPr>
               <a:t>أَطْمَحُ إِلَى أَنْ … وَإِذَا …</a:t>
@@ -18507,6 +18651,7 @@
                   <a:srgbClr val="1B3B6F"/>
                 </a:solidFill>
                 <a:latin typeface="Amiri" pitchFamily="2" charset="-78"/>
+                <a:ea typeface="Amiri" pitchFamily="2" charset="-78"/>
                 <a:cs typeface="Amiri" pitchFamily="2" charset="-78"/>
               </a:rPr>
               <a:t>كَيْفَ تَرَى مُسْتَقْبَلَكَ فِي عَالَمٍ مُتَّصِلٍ؟</a:t>
@@ -18716,6 +18861,7 @@
                   <a:srgbClr val="D4AF37"/>
                 </a:solidFill>
                 <a:latin typeface="Amiri" pitchFamily="2" charset="-78"/>
+                <a:ea typeface="Amiri" pitchFamily="2" charset="-78"/>
                 <a:cs typeface="Amiri" pitchFamily="2" charset="-78"/>
               </a:rPr>
               <a:t>م</a:t>
@@ -19036,6 +19182,7 @@
                   <a:srgbClr val="8A6D1E"/>
                 </a:solidFill>
                 <a:latin typeface="Amiri" pitchFamily="2" charset="-78"/>
+                <a:ea typeface="Amiri" pitchFamily="2" charset="-78"/>
                 <a:cs typeface="Amiri" pitchFamily="2" charset="-78"/>
               </a:rPr>
               <a:t>الهُوِيَّةُ وَالثَّقَافَةُ وَالعَالَمُ</a:t>
@@ -19316,6 +19463,7 @@
                   <a:srgbClr val="1B3B6F"/>
                 </a:solidFill>
                 <a:latin typeface="Amiri" pitchFamily="2" charset="-78"/>
+                <a:ea typeface="Amiri" pitchFamily="2" charset="-78"/>
                 <a:cs typeface="Amiri" pitchFamily="2" charset="-78"/>
               </a:rPr>
               <a:t>صَحِيحٌ أَنَّ … غَيْرَ أَنَّ …</a:t>
@@ -19392,6 +19540,7 @@
                   <a:srgbClr val="1B3B6F"/>
                 </a:solidFill>
                 <a:latin typeface="Amiri" pitchFamily="2" charset="-78"/>
+                <a:ea typeface="Amiri" pitchFamily="2" charset="-78"/>
                 <a:cs typeface="Amiri" pitchFamily="2" charset="-78"/>
               </a:rPr>
               <a:t>هَلْ يُمْكِنُ أَنْ نَكُونَ مُوَاطِنِينَ عَالَمِيِّينَ وَنَحْتَفِظَ بِهُوِيَّتِنَا؟</a:t>
@@ -19495,6 +19644,7 @@
                   <a:srgbClr val="1B3B6F"/>
                 </a:solidFill>
                 <a:latin typeface="Amiri" pitchFamily="2" charset="-78"/>
+                <a:ea typeface="Amiri" pitchFamily="2" charset="-78"/>
                 <a:cs typeface="Amiri" pitchFamily="2" charset="-78"/>
               </a:rPr>
               <a:t>إِنَّ اللُّغَةَ … ؛ فَإِذَا … شَعَرَ …</a:t>
@@ -19571,6 +19721,7 @@
                   <a:srgbClr val="1B3B6F"/>
                 </a:solidFill>
                 <a:latin typeface="Amiri" pitchFamily="2" charset="-78"/>
+                <a:ea typeface="Amiri" pitchFamily="2" charset="-78"/>
                 <a:cs typeface="Amiri" pitchFamily="2" charset="-78"/>
               </a:rPr>
               <a:t>مَا دَوْرُ اللُّغَاتِ فِي التَّفَاهُمِ بَيْنَ الشُّعُوبِ؟</a:t>
@@ -19674,6 +19825,7 @@
                   <a:srgbClr val="1B3B6F"/>
                 </a:solidFill>
                 <a:latin typeface="Amiri" pitchFamily="2" charset="-78"/>
+                <a:ea typeface="Amiri" pitchFamily="2" charset="-78"/>
                 <a:cs typeface="Amiri" pitchFamily="2" charset="-78"/>
               </a:rPr>
               <a:t>كَانَ أَجْدَادِي … أَمَّا جِيلُنَا فَيَعِيشُ … مِمَّا …</a:t>
@@ -19750,6 +19902,7 @@
                   <a:srgbClr val="1B3B6F"/>
                 </a:solidFill>
                 <a:latin typeface="Amiri" pitchFamily="2" charset="-78"/>
+                <a:ea typeface="Amiri" pitchFamily="2" charset="-78"/>
                 <a:cs typeface="Amiri" pitchFamily="2" charset="-78"/>
               </a:rPr>
               <a:t>كَيْفَ اخْتَلَفَتْ تَجْرِبَةُ جِيلِكَ عَنْ تَجْرِبَةِ أَجْدَادِكَ؟</a:t>
@@ -19853,6 +20006,7 @@
                   <a:srgbClr val="1B3B6F"/>
                 </a:solidFill>
                 <a:latin typeface="Amiri" pitchFamily="2" charset="-78"/>
+                <a:ea typeface="Amiri" pitchFamily="2" charset="-78"/>
                 <a:cs typeface="Amiri" pitchFamily="2" charset="-78"/>
               </a:rPr>
               <a:t>تَعَلَّمْتُ أَنَّ … ؛ فَعِنْدَمَا …</a:t>
@@ -19929,6 +20083,7 @@
                   <a:srgbClr val="1B3B6F"/>
                 </a:solidFill>
                 <a:latin typeface="Amiri" pitchFamily="2" charset="-78"/>
+                <a:ea typeface="Amiri" pitchFamily="2" charset="-78"/>
                 <a:cs typeface="Amiri" pitchFamily="2" charset="-78"/>
               </a:rPr>
               <a:t>مَا أَهَمُّ دَرْسٍ تَعَلَّمْتَهُ مِنَ العَيْشِ بَيْنَ ثَقَافَتَيْنِ؟</a:t>
@@ -20032,6 +20187,7 @@
                   <a:srgbClr val="1B3B6F"/>
                 </a:solidFill>
                 <a:latin typeface="Amiri" pitchFamily="2" charset="-78"/>
+                <a:ea typeface="Amiri" pitchFamily="2" charset="-78"/>
                 <a:cs typeface="Amiri" pitchFamily="2" charset="-78"/>
               </a:rPr>
               <a:t>لَوْ كَتَبْتُ لَهُ، لَقُلْتُ …</a:t>
@@ -20108,6 +20264,7 @@
                   <a:srgbClr val="1B3B6F"/>
                 </a:solidFill>
                 <a:latin typeface="Amiri" pitchFamily="2" charset="-78"/>
+                <a:ea typeface="Amiri" pitchFamily="2" charset="-78"/>
                 <a:cs typeface="Amiri" pitchFamily="2" charset="-78"/>
               </a:rPr>
               <a:t>لَوْ كَتَبْتَ رِسَالَةً إِلَى طِفْلٍ يَصِلُ إِلَى بَرِيطَانْيَا اليَوْمَ، مَاذَا تَقُولُ؟</a:t>
@@ -20317,6 +20474,7 @@
                   <a:srgbClr val="D4AF37"/>
                 </a:solidFill>
                 <a:latin typeface="Amiri" pitchFamily="2" charset="-78"/>
+                <a:ea typeface="Amiri" pitchFamily="2" charset="-78"/>
                 <a:cs typeface="Amiri" pitchFamily="2" charset="-78"/>
               </a:rPr>
               <a:t>م</a:t>
@@ -20637,6 +20795,7 @@
                   <a:srgbClr val="8A6D1E"/>
                 </a:solidFill>
                 <a:latin typeface="Amiri" pitchFamily="2" charset="-78"/>
+                <a:ea typeface="Amiri" pitchFamily="2" charset="-78"/>
                 <a:cs typeface="Amiri" pitchFamily="2" charset="-78"/>
               </a:rPr>
               <a:t>آدَابُ الصَّفِّ</a:t>
@@ -22168,6 +22327,7 @@
                   <a:srgbClr val="D4AF37"/>
                 </a:solidFill>
                 <a:latin typeface="Amiri" pitchFamily="2" charset="-78"/>
+                <a:ea typeface="Amiri" pitchFamily="2" charset="-78"/>
                 <a:cs typeface="Amiri" pitchFamily="2" charset="-78"/>
               </a:rPr>
               <a:t>م</a:t>
@@ -22488,6 +22648,7 @@
                   <a:srgbClr val="8A6D1E"/>
                 </a:solidFill>
                 <a:latin typeface="Amiri" pitchFamily="2" charset="-78"/>
+                <a:ea typeface="Amiri" pitchFamily="2" charset="-78"/>
                 <a:cs typeface="Amiri" pitchFamily="2" charset="-78"/>
               </a:rPr>
               <a:t>نَمُوذَجُ الإِجَابَةِ</a:t>
@@ -22730,6 +22891,7 @@
                   <a:srgbClr val="1B3B6F"/>
                 </a:solidFill>
                 <a:latin typeface="Amiri" pitchFamily="2" charset="-78"/>
+                <a:ea typeface="Amiri" pitchFamily="2" charset="-78"/>
                 <a:cs typeface="Amiri" pitchFamily="2" charset="-78"/>
               </a:rPr>
               <a:t>أُسْرَتِي مِنَ الجَزَائِرِ.</a:t>
@@ -22806,6 +22968,7 @@
                   <a:srgbClr val="1B3B6F"/>
                 </a:solidFill>
                 <a:latin typeface="Amiri" pitchFamily="2" charset="-78"/>
+                <a:ea typeface="Amiri" pitchFamily="2" charset="-78"/>
                 <a:cs typeface="Amiri" pitchFamily="2" charset="-78"/>
               </a:rPr>
               <a:t>مِنْ أَيْنَ أُسْرَتُكَ؟</a:t>
@@ -22909,6 +23072,7 @@
                   <a:srgbClr val="1B3B6F"/>
                 </a:solidFill>
                 <a:latin typeface="Amiri" pitchFamily="2" charset="-78"/>
+                <a:ea typeface="Amiri" pitchFamily="2" charset="-78"/>
                 <a:cs typeface="Amiri" pitchFamily="2" charset="-78"/>
               </a:rPr>
               <a:t>أَتَكَلَّمُ ثَلَاثَ لُغَاتٍ.</a:t>
@@ -22985,6 +23149,7 @@
                   <a:srgbClr val="1B3B6F"/>
                 </a:solidFill>
                 <a:latin typeface="Amiri" pitchFamily="2" charset="-78"/>
+                <a:ea typeface="Amiri" pitchFamily="2" charset="-78"/>
                 <a:cs typeface="Amiri" pitchFamily="2" charset="-78"/>
               </a:rPr>
               <a:t>كَمْ لُغَةً تَتَكَلَّمُ؟</a:t>
@@ -23088,6 +23253,7 @@
                   <a:srgbClr val="1B3B6F"/>
                 </a:solidFill>
                 <a:latin typeface="Amiri" pitchFamily="2" charset="-78"/>
+                <a:ea typeface="Amiri" pitchFamily="2" charset="-78"/>
                 <a:cs typeface="Amiri" pitchFamily="2" charset="-78"/>
               </a:rPr>
               <a:t>أَكْلَتُنَا الشَّعْبِيَّةُ الكُسْكُسُ.</a:t>
@@ -23164,6 +23330,7 @@
                   <a:srgbClr val="1B3B6F"/>
                 </a:solidFill>
                 <a:latin typeface="Amiri" pitchFamily="2" charset="-78"/>
+                <a:ea typeface="Amiri" pitchFamily="2" charset="-78"/>
                 <a:cs typeface="Amiri" pitchFamily="2" charset="-78"/>
               </a:rPr>
               <a:t>مَا أَكْلَتُكُمُ الشَّعْبِيَّةُ؟</a:t>
@@ -23267,6 +23434,7 @@
                   <a:srgbClr val="1B3B6F"/>
                 </a:solidFill>
                 <a:latin typeface="Amiri" pitchFamily="2" charset="-78"/>
+                <a:ea typeface="Amiri" pitchFamily="2" charset="-78"/>
                 <a:cs typeface="Amiri" pitchFamily="2" charset="-78"/>
               </a:rPr>
               <a:t>عِيدِيَ المُفَضَّلُ عِيدُ الأَضْحَى، لِأَنَّ العَائِلَةَ تَجْتَمِعُ.</a:t>
@@ -23343,6 +23511,7 @@
                   <a:srgbClr val="1B3B6F"/>
                 </a:solidFill>
                 <a:latin typeface="Amiri" pitchFamily="2" charset="-78"/>
+                <a:ea typeface="Amiri" pitchFamily="2" charset="-78"/>
                 <a:cs typeface="Amiri" pitchFamily="2" charset="-78"/>
               </a:rPr>
               <a:t>مَا عِيدُكَ المُفَضَّلُ؟</a:t>
@@ -23446,6 +23615,7 @@
                   <a:srgbClr val="1B3B6F"/>
                 </a:solidFill>
                 <a:latin typeface="Amiri" pitchFamily="2" charset="-78"/>
+                <a:ea typeface="Amiri" pitchFamily="2" charset="-78"/>
                 <a:cs typeface="Amiri" pitchFamily="2" charset="-78"/>
               </a:rPr>
               <a:t>أُرِيدُ أَنْ أُسَافِرَ إِلَى اليَابَانِ.</a:t>
@@ -23522,6 +23692,7 @@
                   <a:srgbClr val="1B3B6F"/>
                 </a:solidFill>
                 <a:latin typeface="Amiri" pitchFamily="2" charset="-78"/>
+                <a:ea typeface="Amiri" pitchFamily="2" charset="-78"/>
                 <a:cs typeface="Amiri" pitchFamily="2" charset="-78"/>
               </a:rPr>
               <a:t>أَيْنَ تُرِيدُ أَنْ تُسَافِرَ؟</a:t>
@@ -23731,6 +23902,7 @@
                   <a:srgbClr val="D4AF37"/>
                 </a:solidFill>
                 <a:latin typeface="Amiri" pitchFamily="2" charset="-78"/>
+                <a:ea typeface="Amiri" pitchFamily="2" charset="-78"/>
                 <a:cs typeface="Amiri" pitchFamily="2" charset="-78"/>
               </a:rPr>
               <a:t>م</a:t>
@@ -24051,6 +24223,7 @@
                   <a:srgbClr val="8A6D1E"/>
                 </a:solidFill>
                 <a:latin typeface="Amiri" pitchFamily="2" charset="-78"/>
+                <a:ea typeface="Amiri" pitchFamily="2" charset="-78"/>
                 <a:cs typeface="Amiri" pitchFamily="2" charset="-78"/>
               </a:rPr>
               <a:t>نَمُوذَجُ الإِجَابَةِ</a:t>
@@ -24293,6 +24466,7 @@
                   <a:srgbClr val="1B3B6F"/>
                 </a:solidFill>
                 <a:latin typeface="Amiri" pitchFamily="2" charset="-78"/>
+                <a:ea typeface="Amiri" pitchFamily="2" charset="-78"/>
                 <a:cs typeface="Amiri" pitchFamily="2" charset="-78"/>
               </a:rPr>
               <a:t>كُنْتُ أَتَكَلَّمُ العَرَبِيَّةَ فِي البَيْتِ فَقَطْ، أَمَّا الآنَ فَأَدْرُسُ بِالإِنْجْلِيزِيَّةِ، وَسَأَتَعَلَّمُ الإِسْبَانِيَّةَ فِي الجَامِعَةِ.</a:t>
@@ -24369,6 +24543,7 @@
                   <a:srgbClr val="1B3B6F"/>
                 </a:solidFill>
                 <a:latin typeface="Amiri" pitchFamily="2" charset="-78"/>
+                <a:ea typeface="Amiri" pitchFamily="2" charset="-78"/>
                 <a:cs typeface="Amiri" pitchFamily="2" charset="-78"/>
               </a:rPr>
               <a:t>كَيْفَ تَغَيَّرَتْ لُغَاتُكَ مُنْذُ طُفُولَتِكَ؟</a:t>
@@ -24472,6 +24647,7 @@
                   <a:srgbClr val="1B3B6F"/>
                 </a:solidFill>
                 <a:latin typeface="Amiri" pitchFamily="2" charset="-78"/>
+                <a:ea typeface="Amiri" pitchFamily="2" charset="-78"/>
                 <a:cs typeface="Amiri" pitchFamily="2" charset="-78"/>
               </a:rPr>
               <a:t>أَوَّلًا، نُقَدِّمُ القَهْوَةَ وَالتَّمْرَ لِكُلِّ ضَيْفٍ؛ بِالإِضَافَةِ إِلَى ذٰلِكَ، لَا يَخْرُجُ الضَّيْفُ قَبْلَ أَنْ يَأْكُلَ.</a:t>
@@ -24548,6 +24724,7 @@
                   <a:srgbClr val="1B3B6F"/>
                 </a:solidFill>
                 <a:latin typeface="Amiri" pitchFamily="2" charset="-78"/>
+                <a:ea typeface="Amiri" pitchFamily="2" charset="-78"/>
                 <a:cs typeface="Amiri" pitchFamily="2" charset="-78"/>
               </a:rPr>
               <a:t>صِفْ عَادَةً مِنْ عَادَاتِ الضِّيَافَةِ فِي ثَقَافَتِكَ.</a:t>
@@ -24651,6 +24828,7 @@
                   <a:srgbClr val="1B3B6F"/>
                 </a:solidFill>
                 <a:latin typeface="Amiri" pitchFamily="2" charset="-78"/>
+                <a:ea typeface="Amiri" pitchFamily="2" charset="-78"/>
                 <a:cs typeface="Amiri" pitchFamily="2" charset="-78"/>
               </a:rPr>
               <a:t>زُرْتُ المَغْرِبَ فِي تَبَادُلٍ ثَقَافِيٍّ، فَتَعَلَّمْتُ أَنَّ الكَرَمَ لُغَةٌ عَالَمِيَّةٌ، وَمَعَ ذٰلِكَ كَانَتِ اللَّهْجَةُ صَعْبَةً جِدًّا.</a:t>
@@ -24727,6 +24905,7 @@
                   <a:srgbClr val="1B3B6F"/>
                 </a:solidFill>
                 <a:latin typeface="Amiri" pitchFamily="2" charset="-78"/>
+                <a:ea typeface="Amiri" pitchFamily="2" charset="-78"/>
                 <a:cs typeface="Amiri" pitchFamily="2" charset="-78"/>
               </a:rPr>
               <a:t>حَدِّثْنِي عَنْ رِحْلَةٍ تَعَلَّمْتَ مِنْهَا شَيْئًا.</a:t>
@@ -24830,6 +25009,7 @@
                   <a:srgbClr val="1B3B6F"/>
                 </a:solidFill>
                 <a:latin typeface="Amiri" pitchFamily="2" charset="-78"/>
+                <a:ea typeface="Amiri" pitchFamily="2" charset="-78"/>
                 <a:cs typeface="Amiri" pitchFamily="2" charset="-78"/>
               </a:rPr>
               <a:t>العِيدُ فِي الجَزَائِرِ أَكْبَرُ مِنْ هُنَا، بَيْنَمَا يُحْتَفَلُ هُنَا بِلَيْلَةِ الأَلْعَابِ النَّارِيَّةِ فِي الشِّتَاءِ؛ وَكِلَاهُمَا يَجْمَعُ النَّاسَ.</a:t>
@@ -24909,6 +25089,7 @@
                   <a:srgbClr val="1B3B6F"/>
                 </a:solidFill>
                 <a:latin typeface="Amiri" pitchFamily="2" charset="-78"/>
+                <a:ea typeface="Amiri" pitchFamily="2" charset="-78"/>
                 <a:cs typeface="Amiri" pitchFamily="2" charset="-78"/>
               </a:rPr>
               <a:t>قَارِنْ بَيْنَ احْتِفَالٍ هُنَا وَاحْتِفَالٍ فِي بَلَدِ أُسْرَتِكَ.</a:t>
@@ -25012,6 +25193,7 @@
                   <a:srgbClr val="1B3B6F"/>
                 </a:solidFill>
                 <a:latin typeface="Amiri" pitchFamily="2" charset="-78"/>
+                <a:ea typeface="Amiri" pitchFamily="2" charset="-78"/>
                 <a:cs typeface="Amiri" pitchFamily="2" charset="-78"/>
               </a:rPr>
               <a:t>أَطْمَحُ إِلَى أَنْ أَعْمَلَ فِي مُنَظَّمَةٍ دُوَلِيَّةٍ، وَإِذَا نَجَحْتُ فِي ذٰلِكَ، فَسَأَسْتَخْدِمُ لُغَاتِي لِلتَّقْرِيبِ بَيْنَ النَّاسِ.</a:t>
@@ -25088,6 +25270,7 @@
                   <a:srgbClr val="1B3B6F"/>
                 </a:solidFill>
                 <a:latin typeface="Amiri" pitchFamily="2" charset="-78"/>
+                <a:ea typeface="Amiri" pitchFamily="2" charset="-78"/>
                 <a:cs typeface="Amiri" pitchFamily="2" charset="-78"/>
               </a:rPr>
               <a:t>كَيْفَ تَرَى مُسْتَقْبَلَكَ فِي عَالَمٍ مُتَّصِلٍ؟</a:t>
@@ -25297,6 +25480,7 @@
                   <a:srgbClr val="D4AF37"/>
                 </a:solidFill>
                 <a:latin typeface="Amiri" pitchFamily="2" charset="-78"/>
+                <a:ea typeface="Amiri" pitchFamily="2" charset="-78"/>
                 <a:cs typeface="Amiri" pitchFamily="2" charset="-78"/>
               </a:rPr>
               <a:t>م</a:t>
@@ -25617,6 +25801,7 @@
                   <a:srgbClr val="8A6D1E"/>
                 </a:solidFill>
                 <a:latin typeface="Amiri" pitchFamily="2" charset="-78"/>
+                <a:ea typeface="Amiri" pitchFamily="2" charset="-78"/>
                 <a:cs typeface="Amiri" pitchFamily="2" charset="-78"/>
               </a:rPr>
               <a:t>نَمُوذَجُ الإِجَابَةِ</a:t>
@@ -25862,6 +26047,7 @@
                   <a:srgbClr val="1B3B6F"/>
                 </a:solidFill>
                 <a:latin typeface="Amiri" pitchFamily="2" charset="-78"/>
+                <a:ea typeface="Amiri" pitchFamily="2" charset="-78"/>
                 <a:cs typeface="Amiri" pitchFamily="2" charset="-78"/>
               </a:rPr>
               <a:t>صَحِيحٌ أَنَّ العَالَمَ يَدْفَعُنَا نَحْوَ التَّشَابُهِ، غَيْرَ أَنَّ الهُوِيَّةَ القَوِيَّةَ هِيَ الَّتِي تَجْعَلُ مُشَارَكَتَنَا فِي العَالَمِ ذَاتَ قِيمَةٍ؛ فَالجِذْرُ لَا يَمْنَعُ الشَّجَرَةَ مِنَ النُّمُوِّ.</a:t>
@@ -25941,6 +26127,7 @@
                   <a:srgbClr val="1B3B6F"/>
                 </a:solidFill>
                 <a:latin typeface="Amiri" pitchFamily="2" charset="-78"/>
+                <a:ea typeface="Amiri" pitchFamily="2" charset="-78"/>
                 <a:cs typeface="Amiri" pitchFamily="2" charset="-78"/>
               </a:rPr>
               <a:t>هَلْ يُمْكِنُ أَنْ نَكُونَ مُوَاطِنِينَ عَالَمِيِّينَ وَنَحْتَفِظَ بِهُوِيَّتِنَا؟</a:t>
@@ -26044,6 +26231,7 @@
                   <a:srgbClr val="1B3B6F"/>
                 </a:solidFill>
                 <a:latin typeface="Amiri" pitchFamily="2" charset="-78"/>
+                <a:ea typeface="Amiri" pitchFamily="2" charset="-78"/>
                 <a:cs typeface="Amiri" pitchFamily="2" charset="-78"/>
               </a:rPr>
               <a:t>إِنَّ اللُّغَةَ مِفْتَاحُ القَلْبِ لَا العَقْلِ فَقَطْ؛ فَإِذَا كَلَّمْتَ إِنْسَانًا بِلُغَتِهِ، شَعَرَ بِأَنَّكَ تَحْتَرِمُهُ قَبْلَ أَنْ يَسْمَعَ أَفْكَارَكَ.</a:t>
@@ -26120,6 +26308,7 @@
                   <a:srgbClr val="1B3B6F"/>
                 </a:solidFill>
                 <a:latin typeface="Amiri" pitchFamily="2" charset="-78"/>
+                <a:ea typeface="Amiri" pitchFamily="2" charset="-78"/>
                 <a:cs typeface="Amiri" pitchFamily="2" charset="-78"/>
               </a:rPr>
               <a:t>مَا دَوْرُ اللُّغَاتِ فِي التَّفَاهُمِ بَيْنَ الشُّعُوبِ؟</a:t>
@@ -26226,6 +26415,7 @@
                   <a:srgbClr val="1B3B6F"/>
                 </a:solidFill>
                 <a:latin typeface="Amiri" pitchFamily="2" charset="-78"/>
+                <a:ea typeface="Amiri" pitchFamily="2" charset="-78"/>
                 <a:cs typeface="Amiri" pitchFamily="2" charset="-78"/>
               </a:rPr>
               <a:t>كَانَ أَجْدَادِي يَعِيشُونَ فِي قَرْيَةٍ وَاحِدَةٍ طُولَ حَيَاتِهِمْ، أَمَّا جِيلُنَا فَيَعِيشُ بَيْنَ بُلْدَانٍ وَلُغَاتٍ، مِمَّا يُعْطِينَا فُرَصًا أَكْثَرَ وَأَسْئِلَةً أَصْعَبَ عَنِ الانْتِمَاءِ.</a:t>
@@ -26302,6 +26492,7 @@
                   <a:srgbClr val="1B3B6F"/>
                 </a:solidFill>
                 <a:latin typeface="Amiri" pitchFamily="2" charset="-78"/>
+                <a:ea typeface="Amiri" pitchFamily="2" charset="-78"/>
                 <a:cs typeface="Amiri" pitchFamily="2" charset="-78"/>
               </a:rPr>
               <a:t>كَيْفَ اخْتَلَفَتْ تَجْرِبَةُ جِيلِكَ عَنْ تَجْرِبَةِ أَجْدَادِكَ؟</a:t>
@@ -26511,6 +26702,7 @@
                   <a:srgbClr val="D4AF37"/>
                 </a:solidFill>
                 <a:latin typeface="Amiri" pitchFamily="2" charset="-78"/>
+                <a:ea typeface="Amiri" pitchFamily="2" charset="-78"/>
                 <a:cs typeface="Amiri" pitchFamily="2" charset="-78"/>
               </a:rPr>
               <a:t>م</a:t>
@@ -26831,6 +27023,7 @@
                   <a:srgbClr val="8A6D1E"/>
                 </a:solidFill>
                 <a:latin typeface="Amiri" pitchFamily="2" charset="-78"/>
+                <a:ea typeface="Amiri" pitchFamily="2" charset="-78"/>
                 <a:cs typeface="Amiri" pitchFamily="2" charset="-78"/>
               </a:rPr>
               <a:t>نَمُوذَجُ الإِجَابَةِ</a:t>
@@ -27073,6 +27266,7 @@
                   <a:srgbClr val="1B3B6F"/>
                 </a:solidFill>
                 <a:latin typeface="Amiri" pitchFamily="2" charset="-78"/>
+                <a:ea typeface="Amiri" pitchFamily="2" charset="-78"/>
                 <a:cs typeface="Amiri" pitchFamily="2" charset="-78"/>
               </a:rPr>
               <a:t>تَعَلَّمْتُ أَنَّ "مُخْتَلِفٌ" لَا تَعْنِي "أَسْوَأَ"؛ فَعِنْدَمَا ضَحِكْتُ مِنْ عَادَةٍ إِنْجْلِيزِيَّةٍ، ضَحِكَ زُمَلَائِي مِنْ عَادَةٍ عِنْدَنَا، فَفَهِمْنَا مَعًا أَنَّ لِكُلِّ عَادَةٍ سَبَبًا.</a:t>
@@ -27149,6 +27343,7 @@
                   <a:srgbClr val="1B3B6F"/>
                 </a:solidFill>
                 <a:latin typeface="Amiri" pitchFamily="2" charset="-78"/>
+                <a:ea typeface="Amiri" pitchFamily="2" charset="-78"/>
                 <a:cs typeface="Amiri" pitchFamily="2" charset="-78"/>
               </a:rPr>
               <a:t>مَا أَهَمُّ دَرْسٍ تَعَلَّمْتَهُ مِنَ العَيْشِ بَيْنَ ثَقَافَتَيْنِ؟</a:t>
@@ -27252,6 +27447,7 @@
                   <a:srgbClr val="1B3B6F"/>
                 </a:solidFill>
                 <a:latin typeface="Amiri" pitchFamily="2" charset="-78"/>
+                <a:ea typeface="Amiri" pitchFamily="2" charset="-78"/>
                 <a:cs typeface="Amiri" pitchFamily="2" charset="-78"/>
               </a:rPr>
               <a:t>لَوْ كَتَبْتُ لَهُ، لَقُلْتُ: "تَعَلَّمْ لُغَتَهُمْ، وَلَا تَنْسَ لُغَتَكَ؛ وَاحْمِلْ عَادَاتِكَ مَعَكَ كَهَدِيَّةٍ لَا كَحِمْلٍ ثَقِيلٍ".</a:t>
@@ -27331,6 +27527,7 @@
                   <a:srgbClr val="1B3B6F"/>
                 </a:solidFill>
                 <a:latin typeface="Amiri" pitchFamily="2" charset="-78"/>
+                <a:ea typeface="Amiri" pitchFamily="2" charset="-78"/>
                 <a:cs typeface="Amiri" pitchFamily="2" charset="-78"/>
               </a:rPr>
               <a:t>لَوْ كَتَبْتَ رِسَالَةً إِلَى طِفْلٍ يَصِلُ إِلَى بَرِيطَانْيَا اليَوْمَ، مَاذَا تَقُولُ؟</a:t>
@@ -27540,6 +27737,7 @@
                   <a:srgbClr val="D4AF37"/>
                 </a:solidFill>
                 <a:latin typeface="Amiri" pitchFamily="2" charset="-78"/>
+                <a:ea typeface="Amiri" pitchFamily="2" charset="-78"/>
                 <a:cs typeface="Amiri" pitchFamily="2" charset="-78"/>
               </a:rPr>
               <a:t>م</a:t>
@@ -27860,6 +28058,7 @@
                   <a:srgbClr val="8A6D1E"/>
                 </a:solidFill>
                 <a:latin typeface="Amiri" pitchFamily="2" charset="-78"/>
+                <a:ea typeface="Amiri" pitchFamily="2" charset="-78"/>
                 <a:cs typeface="Amiri" pitchFamily="2" charset="-78"/>
               </a:rPr>
               <a:t>قَيِّمْ عَمَلَكَ</a:t>
@@ -29104,6 +29303,7 @@
                   <a:srgbClr val="FFFFFF"/>
                 </a:solidFill>
                 <a:latin typeface="Amiri" pitchFamily="2" charset="-78"/>
+                <a:ea typeface="Amiri" pitchFamily="2" charset="-78"/>
                 <a:cs typeface="Amiri" pitchFamily="2" charset="-78"/>
               </a:rPr>
               <a:t>أَحْسَنْتُمْ! إِلَى اللِّقَاءِ</a:t>
@@ -29256,6 +29456,7 @@
                   <a:srgbClr val="D4AF37"/>
                 </a:solidFill>
                 <a:latin typeface="Amiri" pitchFamily="2" charset="-78"/>
+                <a:ea typeface="Amiri" pitchFamily="2" charset="-78"/>
                 <a:cs typeface="Amiri" pitchFamily="2" charset="-78"/>
               </a:rPr>
               <a:t>وَرْشَةُ الكِتَابَةِ</a:t>
@@ -29389,6 +29590,7 @@
                   <a:srgbClr val="D4AF37"/>
                 </a:solidFill>
                 <a:latin typeface="Amiri" pitchFamily="2" charset="-78"/>
+                <a:ea typeface="Amiri" pitchFamily="2" charset="-78"/>
                 <a:cs typeface="Amiri" pitchFamily="2" charset="-78"/>
               </a:rPr>
               <a:t>م</a:t>
@@ -29709,6 +29911,7 @@
                   <a:srgbClr val="8A6D1E"/>
                 </a:solidFill>
                 <a:latin typeface="Amiri" pitchFamily="2" charset="-78"/>
+                <a:ea typeface="Amiri" pitchFamily="2" charset="-78"/>
                 <a:cs typeface="Amiri" pitchFamily="2" charset="-78"/>
               </a:rPr>
               <a:t>خَرِيطَةُ الوَرْشَةِ</a:t>
@@ -30023,6 +30226,7 @@
                   <a:srgbClr val="1B3B6F"/>
                 </a:solidFill>
                 <a:latin typeface="Amiri" pitchFamily="2" charset="-78"/>
+                <a:ea typeface="Amiri" pitchFamily="2" charset="-78"/>
                 <a:cs typeface="Amiri" pitchFamily="2" charset="-78"/>
               </a:rPr>
               <a:t>كَيْفَ</a:t>
@@ -30299,6 +30503,7 @@
                   <a:srgbClr val="1E6B52"/>
                 </a:solidFill>
                 <a:latin typeface="Amiri" pitchFamily="2" charset="-78"/>
+                <a:ea typeface="Amiri" pitchFamily="2" charset="-78"/>
                 <a:cs typeface="Amiri" pitchFamily="2" charset="-78"/>
               </a:rPr>
               <a:t>تَمْثِيلُ الدَّوْرِ</a:t>
@@ -30575,6 +30780,7 @@
                   <a:srgbClr val="8A6D1E"/>
                 </a:solidFill>
                 <a:latin typeface="Amiri" pitchFamily="2" charset="-78"/>
+                <a:ea typeface="Amiri" pitchFamily="2" charset="-78"/>
                 <a:cs typeface="Amiri" pitchFamily="2" charset="-78"/>
               </a:rPr>
               <a:t>النَّمُوذَجُ</a:t>
@@ -30851,6 +31057,7 @@
                   <a:srgbClr val="1E6B52"/>
                 </a:solidFill>
                 <a:latin typeface="Amiri" pitchFamily="2" charset="-78"/>
+                <a:ea typeface="Amiri" pitchFamily="2" charset="-78"/>
                 <a:cs typeface="Amiri" pitchFamily="2" charset="-78"/>
               </a:rPr>
               <a:t>المُحَادَثَةُ</a:t>
@@ -31127,6 +31334,7 @@
                   <a:srgbClr val="8A6D1E"/>
                 </a:solidFill>
                 <a:latin typeface="Amiri" pitchFamily="2" charset="-78"/>
+                <a:ea typeface="Amiri" pitchFamily="2" charset="-78"/>
                 <a:cs typeface="Amiri" pitchFamily="2" charset="-78"/>
               </a:rPr>
               <a:t>قَيِّمْ</a:t>
@@ -31370,6 +31578,7 @@
                   <a:srgbClr val="D4AF37"/>
                 </a:solidFill>
                 <a:latin typeface="Amiri" pitchFamily="2" charset="-78"/>
+                <a:ea typeface="Amiri" pitchFamily="2" charset="-78"/>
                 <a:cs typeface="Amiri" pitchFamily="2" charset="-78"/>
               </a:rPr>
               <a:t>م</a:t>
@@ -31690,6 +31899,7 @@
                   <a:srgbClr val="8A6D1E"/>
                 </a:solidFill>
                 <a:latin typeface="Amiri" pitchFamily="2" charset="-78"/>
+                <a:ea typeface="Amiri" pitchFamily="2" charset="-78"/>
                 <a:cs typeface="Amiri" pitchFamily="2" charset="-78"/>
               </a:rPr>
               <a:t>امْتِحَانُ التَّحَدُّثِ</a:t>
@@ -32314,6 +32524,7 @@
                   <a:srgbClr val="1B3B6F"/>
                 </a:solidFill>
                 <a:latin typeface="Amiri" pitchFamily="2" charset="-78"/>
+                <a:ea typeface="Amiri" pitchFamily="2" charset="-78"/>
                 <a:cs typeface="Amiri" pitchFamily="2" charset="-78"/>
               </a:rPr>
               <a:t>عَفْوًا، هَلْ يُمْكِنُ أَنْ تُعِيدَ السُّؤَالَ؟</a:t>
@@ -32413,6 +32624,7 @@
                   <a:srgbClr val="1B3B6F"/>
                 </a:solidFill>
                 <a:latin typeface="Amiri" pitchFamily="2" charset="-78"/>
+                <a:ea typeface="Amiri" pitchFamily="2" charset="-78"/>
                 <a:cs typeface="Amiri" pitchFamily="2" charset="-78"/>
               </a:rPr>
               <a:t>لَحْظَةً، دَعْنِي أُفَكِّرُ …</a:t>
@@ -32512,6 +32724,7 @@
                   <a:srgbClr val="1B3B6F"/>
                 </a:solidFill>
                 <a:latin typeface="Amiri" pitchFamily="2" charset="-78"/>
+                <a:ea typeface="Amiri" pitchFamily="2" charset="-78"/>
                 <a:cs typeface="Amiri" pitchFamily="2" charset="-78"/>
               </a:rPr>
               <a:t>أَقْصِدُ …</a:t>
@@ -32683,6 +32896,7 @@
                   <a:srgbClr val="D4AF37"/>
                 </a:solidFill>
                 <a:latin typeface="Amiri" pitchFamily="2" charset="-78"/>
+                <a:ea typeface="Amiri" pitchFamily="2" charset="-78"/>
                 <a:cs typeface="Amiri" pitchFamily="2" charset="-78"/>
               </a:rPr>
               <a:t>م</a:t>
@@ -33003,6 +33217,7 @@
                   <a:srgbClr val="8A6D1E"/>
                 </a:solidFill>
                 <a:latin typeface="Amiri" pitchFamily="2" charset="-78"/>
+                <a:ea typeface="Amiri" pitchFamily="2" charset="-78"/>
                 <a:cs typeface="Amiri" pitchFamily="2" charset="-78"/>
               </a:rPr>
               <a:t>أَدَوَاتُ الرَّبْطِ وَالأَزْمِنَةُ</a:t>
@@ -33306,6 +33521,7 @@
                   <a:srgbClr val="1B3B6F"/>
                 </a:solidFill>
                 <a:latin typeface="Amiri" pitchFamily="2" charset="-78"/>
+                <a:ea typeface="Amiri" pitchFamily="2" charset="-78"/>
                 <a:cs typeface="Amiri" pitchFamily="2" charset="-78"/>
               </a:rPr>
               <a:t>أَوَّلًا · ثُمَّ · أَخِيرًا</a:t>
@@ -33463,6 +33679,7 @@
                   <a:srgbClr val="1B3B6F"/>
                 </a:solidFill>
                 <a:latin typeface="Amiri" pitchFamily="2" charset="-78"/>
+                <a:ea typeface="Amiri" pitchFamily="2" charset="-78"/>
                 <a:cs typeface="Amiri" pitchFamily="2" charset="-78"/>
               </a:rPr>
               <a:t>قَبْلَ ذٰلِكَ</a:t>
@@ -33566,6 +33783,7 @@
                   <a:srgbClr val="1B3B6F"/>
                 </a:solidFill>
                 <a:latin typeface="Amiri" pitchFamily="2" charset="-78"/>
+                <a:ea typeface="Amiri" pitchFamily="2" charset="-78"/>
                 <a:cs typeface="Amiri" pitchFamily="2" charset="-78"/>
               </a:rPr>
               <a:t>بَعْدَ ذٰلِكَ</a:t>
@@ -33831,6 +34049,7 @@
                   <a:srgbClr val="1B3B6F"/>
                 </a:solidFill>
                 <a:latin typeface="Amiri" pitchFamily="2" charset="-78"/>
+                <a:ea typeface="Amiri" pitchFamily="2" charset="-78"/>
                 <a:cs typeface="Amiri" pitchFamily="2" charset="-78"/>
               </a:rPr>
               <a:t>بِالإِضَافَةِ إِلَى ذٰلِكَ</a:t>
@@ -33988,6 +34207,7 @@
                   <a:srgbClr val="1B3B6F"/>
                 </a:solidFill>
                 <a:latin typeface="Amiri" pitchFamily="2" charset="-78"/>
+                <a:ea typeface="Amiri" pitchFamily="2" charset="-78"/>
                 <a:cs typeface="Amiri" pitchFamily="2" charset="-78"/>
               </a:rPr>
               <a:t>فَضْلًا عَنْ ذٰلِكَ</a:t>
@@ -34091,6 +34311,7 @@
                   <a:srgbClr val="1B3B6F"/>
                 </a:solidFill>
                 <a:latin typeface="Amiri" pitchFamily="2" charset="-78"/>
+                <a:ea typeface="Amiri" pitchFamily="2" charset="-78"/>
                 <a:cs typeface="Amiri" pitchFamily="2" charset="-78"/>
               </a:rPr>
               <a:t>كَمَا أَنَّ</a:t>
@@ -34356,6 +34577,7 @@
                   <a:srgbClr val="1B3B6F"/>
                 </a:solidFill>
                 <a:latin typeface="Amiri" pitchFamily="2" charset="-78"/>
+                <a:ea typeface="Amiri" pitchFamily="2" charset="-78"/>
                 <a:cs typeface="Amiri" pitchFamily="2" charset="-78"/>
               </a:rPr>
               <a:t>مَعَ ذٰلِكَ · غَيْرَ أَنَّ</a:t>
@@ -34513,6 +34735,7 @@
                   <a:srgbClr val="1B3B6F"/>
                 </a:solidFill>
                 <a:latin typeface="Amiri" pitchFamily="2" charset="-78"/>
+                <a:ea typeface="Amiri" pitchFamily="2" charset="-78"/>
                 <a:cs typeface="Amiri" pitchFamily="2" charset="-78"/>
               </a:rPr>
               <a:t>بَيْنَمَا</a:t>
@@ -34616,6 +34839,7 @@
                   <a:srgbClr val="1B3B6F"/>
                 </a:solidFill>
                 <a:latin typeface="Amiri" pitchFamily="2" charset="-78"/>
+                <a:ea typeface="Amiri" pitchFamily="2" charset="-78"/>
                 <a:cs typeface="Amiri" pitchFamily="2" charset="-78"/>
               </a:rPr>
               <a:t>مَعَ أَنَّ</a:t>
@@ -34881,6 +35105,7 @@
                   <a:srgbClr val="1B3B6F"/>
                 </a:solidFill>
                 <a:latin typeface="Amiri" pitchFamily="2" charset="-78"/>
+                <a:ea typeface="Amiri" pitchFamily="2" charset="-78"/>
                 <a:cs typeface="Amiri" pitchFamily="2" charset="-78"/>
               </a:rPr>
               <a:t>لِذٰلِكَ · مِمَّا</a:t>
@@ -35038,6 +35263,7 @@
                   <a:srgbClr val="1B3B6F"/>
                 </a:solidFill>
                 <a:latin typeface="Amiri" pitchFamily="2" charset="-78"/>
+                <a:ea typeface="Amiri" pitchFamily="2" charset="-78"/>
                 <a:cs typeface="Amiri" pitchFamily="2" charset="-78"/>
               </a:rPr>
               <a:t>لِكَيْ</a:t>
@@ -35141,6 +35367,7 @@
                   <a:srgbClr val="1B3B6F"/>
                 </a:solidFill>
                 <a:latin typeface="Amiri" pitchFamily="2" charset="-78"/>
+                <a:ea typeface="Amiri" pitchFamily="2" charset="-78"/>
                 <a:cs typeface="Amiri" pitchFamily="2" charset="-78"/>
               </a:rPr>
               <a:t>بِسَبَبِ</a:t>
@@ -35406,6 +35633,7 @@
                   <a:srgbClr val="1B3B6F"/>
                 </a:solidFill>
                 <a:latin typeface="Amiri" pitchFamily="2" charset="-78"/>
+                <a:ea typeface="Amiri" pitchFamily="2" charset="-78"/>
                 <a:cs typeface="Amiri" pitchFamily="2" charset="-78"/>
               </a:rPr>
               <a:t>كُنَّا نَحْتَفِلُ</a:t>
@@ -35563,6 +35791,7 @@
                   <a:srgbClr val="1B3B6F"/>
                 </a:solidFill>
                 <a:latin typeface="Amiri" pitchFamily="2" charset="-78"/>
+                <a:ea typeface="Amiri" pitchFamily="2" charset="-78"/>
                 <a:cs typeface="Amiri" pitchFamily="2" charset="-78"/>
               </a:rPr>
               <a:t>سَنَحْتَفِلُ</a:t>
@@ -35666,6 +35895,7 @@
                   <a:srgbClr val="1B3B6F"/>
                 </a:solidFill>
                 <a:latin typeface="Amiri" pitchFamily="2" charset="-78"/>
+                <a:ea typeface="Amiri" pitchFamily="2" charset="-78"/>
                 <a:cs typeface="Amiri" pitchFamily="2" charset="-78"/>
               </a:rPr>
               <a:t>الآنَ نَحْتَفِلُ</a:t>
@@ -35931,6 +36161,7 @@
                   <a:srgbClr val="1B3B6F"/>
                 </a:solidFill>
                 <a:latin typeface="Amiri" pitchFamily="2" charset="-78"/>
+                <a:ea typeface="Amiri" pitchFamily="2" charset="-78"/>
                 <a:cs typeface="Amiri" pitchFamily="2" charset="-78"/>
               </a:rPr>
               <a:t>حَضْرَتُكَ · حَضْرَتُكِ</a:t>
@@ -36088,6 +36319,7 @@
                   <a:srgbClr val="1B3B6F"/>
                 </a:solidFill>
                 <a:latin typeface="Amiri" pitchFamily="2" charset="-78"/>
+                <a:ea typeface="Amiri" pitchFamily="2" charset="-78"/>
                 <a:cs typeface="Amiri" pitchFamily="2" charset="-78"/>
               </a:rPr>
               <a:t>يَسُرُّنِي أَنْ</a:t>
@@ -36191,6 +36423,7 @@
                   <a:srgbClr val="1B3B6F"/>
                 </a:solidFill>
                 <a:latin typeface="Amiri" pitchFamily="2" charset="-78"/>
+                <a:ea typeface="Amiri" pitchFamily="2" charset="-78"/>
                 <a:cs typeface="Amiri" pitchFamily="2" charset="-78"/>
               </a:rPr>
               <a:t>أَنْتَ · أَنْتِ</a:t>
@@ -36324,6 +36557,7 @@
                   <a:srgbClr val="D4AF37"/>
                 </a:solidFill>
                 <a:latin typeface="Amiri" pitchFamily="2" charset="-78"/>
+                <a:ea typeface="Amiri" pitchFamily="2" charset="-78"/>
                 <a:cs typeface="Amiri" pitchFamily="2" charset="-78"/>
               </a:rPr>
               <a:t>م</a:t>
@@ -36644,6 +36878,7 @@
                   <a:srgbClr val="8A6D1E"/>
                 </a:solidFill>
                 <a:latin typeface="Amiri" pitchFamily="2" charset="-78"/>
+                <a:ea typeface="Amiri" pitchFamily="2" charset="-78"/>
                 <a:cs typeface="Amiri" pitchFamily="2" charset="-78"/>
               </a:rPr>
               <a:t>رِحْلَةُ المِحْوَرِ الخَامِسِ</a:t>
@@ -36947,6 +37182,7 @@
                   <a:srgbClr val="1B3B6F"/>
                 </a:solidFill>
                 <a:latin typeface="Amiri" pitchFamily="2" charset="-78"/>
+                <a:ea typeface="Amiri" pitchFamily="2" charset="-78"/>
                 <a:cs typeface="Amiri" pitchFamily="2" charset="-78"/>
               </a:rPr>
               <a:t>جِنْسِيَّةٌ · لُغَةٌ</a:t>
@@ -37104,6 +37340,7 @@
                   <a:srgbClr val="1B3B6F"/>
                 </a:solidFill>
                 <a:latin typeface="Amiri" pitchFamily="2" charset="-78"/>
+                <a:ea typeface="Amiri" pitchFamily="2" charset="-78"/>
                 <a:cs typeface="Amiri" pitchFamily="2" charset="-78"/>
               </a:rPr>
               <a:t>أَصْلٌ</a:t>
@@ -37207,6 +37444,7 @@
                   <a:srgbClr val="1B3B6F"/>
                 </a:solidFill>
                 <a:latin typeface="Amiri" pitchFamily="2" charset="-78"/>
+                <a:ea typeface="Amiri" pitchFamily="2" charset="-78"/>
                 <a:cs typeface="Amiri" pitchFamily="2" charset="-78"/>
               </a:rPr>
               <a:t>ثُنَائِيُّ اللُّغَةِ</a:t>
@@ -37472,6 +37710,7 @@
                   <a:srgbClr val="1B3B6F"/>
                 </a:solidFill>
                 <a:latin typeface="Amiri" pitchFamily="2" charset="-78"/>
+                <a:ea typeface="Amiri" pitchFamily="2" charset="-78"/>
                 <a:cs typeface="Amiri" pitchFamily="2" charset="-78"/>
               </a:rPr>
               <a:t>عَادَاتٌ · تَقَالِيدُ</a:t>
@@ -37629,6 +37868,7 @@
                   <a:srgbClr val="1B3B6F"/>
                 </a:solidFill>
                 <a:latin typeface="Amiri" pitchFamily="2" charset="-78"/>
+                <a:ea typeface="Amiri" pitchFamily="2" charset="-78"/>
                 <a:cs typeface="Amiri" pitchFamily="2" charset="-78"/>
               </a:rPr>
               <a:t>آدَابٌ</a:t>
@@ -37732,6 +37972,7 @@
                   <a:srgbClr val="1B3B6F"/>
                 </a:solidFill>
                 <a:latin typeface="Amiri" pitchFamily="2" charset="-78"/>
+                <a:ea typeface="Amiri" pitchFamily="2" charset="-78"/>
                 <a:cs typeface="Amiri" pitchFamily="2" charset="-78"/>
               </a:rPr>
               <a:t>الضِّيَافَةُ</a:t>
@@ -37997,6 +38238,7 @@
                   <a:srgbClr val="1B3B6F"/>
                 </a:solidFill>
                 <a:latin typeface="Amiri" pitchFamily="2" charset="-78"/>
+                <a:ea typeface="Amiri" pitchFamily="2" charset="-78"/>
                 <a:cs typeface="Amiri" pitchFamily="2" charset="-78"/>
               </a:rPr>
               <a:t>عِيدٌ · مِهْرَجَانٌ</a:t>
@@ -38154,6 +38396,7 @@
                   <a:srgbClr val="1B3B6F"/>
                 </a:solidFill>
                 <a:latin typeface="Amiri" pitchFamily="2" charset="-78"/>
+                <a:ea typeface="Amiri" pitchFamily="2" charset="-78"/>
                 <a:cs typeface="Amiri" pitchFamily="2" charset="-78"/>
               </a:rPr>
               <a:t>يُحْتَفَلُ بِهِ</a:t>
@@ -38257,6 +38500,7 @@
                   <a:srgbClr val="1B3B6F"/>
                 </a:solidFill>
                 <a:latin typeface="Amiri" pitchFamily="2" charset="-78"/>
+                <a:ea typeface="Amiri" pitchFamily="2" charset="-78"/>
                 <a:cs typeface="Amiri" pitchFamily="2" charset="-78"/>
               </a:rPr>
               <a:t>اليَوْمُ الوَطَنِيُّ</a:t>
@@ -38522,6 +38766,7 @@
                   <a:srgbClr val="1B3B6F"/>
                 </a:solidFill>
                 <a:latin typeface="Amiri" pitchFamily="2" charset="-78"/>
+                <a:ea typeface="Amiri" pitchFamily="2" charset="-78"/>
                 <a:cs typeface="Amiri" pitchFamily="2" charset="-78"/>
               </a:rPr>
               <a:t>تَبَادُلٌ ثَقَافِيٌّ</a:t>
@@ -38679,6 +38924,7 @@
                   <a:srgbClr val="1B3B6F"/>
                 </a:solidFill>
                 <a:latin typeface="Amiri" pitchFamily="2" charset="-78"/>
+                <a:ea typeface="Amiri" pitchFamily="2" charset="-78"/>
                 <a:cs typeface="Amiri" pitchFamily="2" charset="-78"/>
               </a:rPr>
               <a:t>سَافَرْتُ</a:t>
@@ -38782,6 +39028,7 @@
                   <a:srgbClr val="1B3B6F"/>
                 </a:solidFill>
                 <a:latin typeface="Amiri" pitchFamily="2" charset="-78"/>
+                <a:ea typeface="Amiri" pitchFamily="2" charset="-78"/>
                 <a:cs typeface="Amiri" pitchFamily="2" charset="-78"/>
               </a:rPr>
               <a:t>العَائِلَةُ المُضِيفَةُ</a:t>
@@ -39047,6 +39294,7 @@
                   <a:srgbClr val="1B3B6F"/>
                 </a:solidFill>
                 <a:latin typeface="Amiri" pitchFamily="2" charset="-78"/>
+                <a:ea typeface="Amiri" pitchFamily="2" charset="-78"/>
                 <a:cs typeface="Amiri" pitchFamily="2" charset="-78"/>
               </a:rPr>
               <a:t>مُخْتَلِفٌ لَا أَفْضَلُ</a:t>
@@ -39204,6 +39452,7 @@
                   <a:srgbClr val="1B3B6F"/>
                 </a:solidFill>
                 <a:latin typeface="Amiri" pitchFamily="2" charset="-78"/>
+                <a:ea typeface="Amiri" pitchFamily="2" charset="-78"/>
                 <a:cs typeface="Amiri" pitchFamily="2" charset="-78"/>
               </a:rPr>
               <a:t>غَالِبًا</a:t>
@@ -39307,6 +39556,7 @@
                   <a:srgbClr val="1B3B6F"/>
                 </a:solidFill>
                 <a:latin typeface="Amiri" pitchFamily="2" charset="-78"/>
+                <a:ea typeface="Amiri" pitchFamily="2" charset="-78"/>
                 <a:cs typeface="Amiri" pitchFamily="2" charset="-78"/>
               </a:rPr>
               <a:t>أَكْثَرُ … مِنْ</a:t>
@@ -39572,6 +39822,7 @@
                   <a:srgbClr val="1B3B6F"/>
                 </a:solidFill>
                 <a:latin typeface="Amiri" pitchFamily="2" charset="-78"/>
+                <a:ea typeface="Amiri" pitchFamily="2" charset="-78"/>
                 <a:cs typeface="Amiri" pitchFamily="2" charset="-78"/>
               </a:rPr>
               <a:t>لَوْ … لَاخْتَرْتُ · إِذَا … فَسَأَزُورُ</a:t>
@@ -39729,6 +39980,7 @@
                   <a:srgbClr val="1B3B6F"/>
                 </a:solidFill>
                 <a:latin typeface="Amiri" pitchFamily="2" charset="-78"/>
+                <a:ea typeface="Amiri" pitchFamily="2" charset="-78"/>
                 <a:cs typeface="Amiri" pitchFamily="2" charset="-78"/>
               </a:rPr>
               <a:t>إِذَا سَافَرْتُ فَسَأَزُورُ</a:t>
@@ -39832,6 +40084,7 @@
                   <a:srgbClr val="1B3B6F"/>
                 </a:solidFill>
                 <a:latin typeface="Amiri" pitchFamily="2" charset="-78"/>
+                <a:ea typeface="Amiri" pitchFamily="2" charset="-78"/>
                 <a:cs typeface="Amiri" pitchFamily="2" charset="-78"/>
               </a:rPr>
               <a:t>لَوْ كُنْتُ … لَاخْتَرْتُ</a:t>
@@ -39965,6 +40218,7 @@
                   <a:srgbClr val="D4AF37"/>
                 </a:solidFill>
                 <a:latin typeface="Amiri" pitchFamily="2" charset="-78"/>
+                <a:ea typeface="Amiri" pitchFamily="2" charset="-78"/>
                 <a:cs typeface="Amiri" pitchFamily="2" charset="-78"/>
               </a:rPr>
               <a:t>م</a:t>
@@ -40285,6 +40539,7 @@
                   <a:srgbClr val="8A6D1E"/>
                 </a:solidFill>
                 <a:latin typeface="Amiri" pitchFamily="2" charset="-78"/>
+                <a:ea typeface="Amiri" pitchFamily="2" charset="-78"/>
                 <a:cs typeface="Amiri" pitchFamily="2" charset="-78"/>
               </a:rPr>
               <a:t>فِي الغُرَفِ</a:t>
@@ -41461,6 +41716,7 @@
                   <a:srgbClr val="1B3B6F"/>
                 </a:solidFill>
                 <a:latin typeface="Amiri" pitchFamily="2" charset="-78"/>
+                <a:ea typeface="Amiri" pitchFamily="2" charset="-78"/>
                 <a:cs typeface="Amiri" pitchFamily="2" charset="-78"/>
               </a:rPr>
               <a:t>دَوْرُكَ!</a:t>
@@ -41537,6 +41793,7 @@
                   <a:srgbClr val="1B3B6F"/>
                 </a:solidFill>
                 <a:latin typeface="Amiri" pitchFamily="2" charset="-78"/>
+                <a:ea typeface="Amiri" pitchFamily="2" charset="-78"/>
                 <a:cs typeface="Amiri" pitchFamily="2" charset="-78"/>
               </a:rPr>
               <a:t>أَحْسَنْتَ! / أَحْسَنْتِ!</a:t>
@@ -41613,6 +41870,7 @@
                   <a:srgbClr val="1B3B6F"/>
                 </a:solidFill>
                 <a:latin typeface="Amiri" pitchFamily="2" charset="-78"/>
+                <a:ea typeface="Amiri" pitchFamily="2" charset="-78"/>
                 <a:cs typeface="Amiri" pitchFamily="2" charset="-78"/>
               </a:rPr>
               <a:t>تَكَلَّمْ أَكْثَرَ، مِنْ فَضْلِكَ</a:t>
@@ -41689,6 +41947,7 @@
                   <a:srgbClr val="1B3B6F"/>
                 </a:solidFill>
                 <a:latin typeface="Amiri" pitchFamily="2" charset="-78"/>
+                <a:ea typeface="Amiri" pitchFamily="2" charset="-78"/>
                 <a:cs typeface="Amiri" pitchFamily="2" charset="-78"/>
               </a:rPr>
               <a:t>لِمَاذَا؟</a:t>
@@ -41860,6 +42119,7 @@
                   <a:srgbClr val="D4AF37"/>
                 </a:solidFill>
                 <a:latin typeface="Amiri" pitchFamily="2" charset="-78"/>
+                <a:ea typeface="Amiri" pitchFamily="2" charset="-78"/>
                 <a:cs typeface="Amiri" pitchFamily="2" charset="-78"/>
               </a:rPr>
               <a:t>م</a:t>
@@ -42180,6 +42440,7 @@
                   <a:srgbClr val="8A6D1E"/>
                 </a:solidFill>
                 <a:latin typeface="Amiri" pitchFamily="2" charset="-78"/>
+                <a:ea typeface="Amiri" pitchFamily="2" charset="-78"/>
                 <a:cs typeface="Amiri" pitchFamily="2" charset="-78"/>
               </a:rPr>
               <a:t>فِي الأُمْسِيَةِ الدُّوَلِيَّةِ</a:t>
@@ -42460,6 +42721,7 @@
                   <a:srgbClr val="1B3B6F"/>
                 </a:solidFill>
                 <a:latin typeface="Amiri" pitchFamily="2" charset="-78"/>
+                <a:ea typeface="Amiri" pitchFamily="2" charset="-78"/>
                 <a:cs typeface="Amiri" pitchFamily="2" charset="-78"/>
               </a:rPr>
               <a:t>هٰذَا الجَنَاحُ لِلْجَزَائِرِ / لِمِصْرَ …</a:t>
@@ -42536,6 +42798,7 @@
                   <a:srgbClr val="1B3B6F"/>
                 </a:solidFill>
                 <a:latin typeface="Amiri" pitchFamily="2" charset="-78"/>
+                <a:ea typeface="Amiri" pitchFamily="2" charset="-78"/>
                 <a:cs typeface="Amiri" pitchFamily="2" charset="-78"/>
               </a:rPr>
               <a:t>مَسَاءَ الخَيْرِ! لِأَيِّ بَلَدٍ هٰذَا الجَنَاحُ؟</a:t>
@@ -42704,6 +42967,7 @@
                   <a:srgbClr val="1B3B6F"/>
                 </a:solidFill>
                 <a:latin typeface="Amiri" pitchFamily="2" charset="-78"/>
+                <a:ea typeface="Amiri" pitchFamily="2" charset="-78"/>
                 <a:cs typeface="Amiri" pitchFamily="2" charset="-78"/>
               </a:rPr>
               <a:t>يَتَكَلَّمُونَ … وَ…</a:t>
@@ -42780,6 +43044,7 @@
                   <a:srgbClr val="1B3B6F"/>
                 </a:solidFill>
                 <a:latin typeface="Amiri" pitchFamily="2" charset="-78"/>
+                <a:ea typeface="Amiri" pitchFamily="2" charset="-78"/>
                 <a:cs typeface="Amiri" pitchFamily="2" charset="-78"/>
               </a:rPr>
               <a:t>مَا اللُّغَاتُ الَّتِي يَتَكَلَّمُهَا النَّاسُ هُنَاكَ؟</a:t>
@@ -42948,6 +43213,7 @@
                   <a:srgbClr val="1B3B6F"/>
                 </a:solidFill>
                 <a:latin typeface="Amiri" pitchFamily="2" charset="-78"/>
+                <a:ea typeface="Amiri" pitchFamily="2" charset="-78"/>
                 <a:cs typeface="Amiri" pitchFamily="2" charset="-78"/>
               </a:rPr>
               <a:t>هٰذَا … ، وَهُوَ …</a:t>
@@ -43024,6 +43290,7 @@
                   <a:srgbClr val="1B3B6F"/>
                 </a:solidFill>
                 <a:latin typeface="Amiri" pitchFamily="2" charset="-78"/>
+                <a:ea typeface="Amiri" pitchFamily="2" charset="-78"/>
                 <a:cs typeface="Amiri" pitchFamily="2" charset="-78"/>
               </a:rPr>
               <a:t>وَمَا هٰذَا الطَّعَامُ؟</a:t>
@@ -43192,6 +43459,7 @@
                   <a:srgbClr val="1B3B6F"/>
                 </a:solidFill>
                 <a:latin typeface="Amiri" pitchFamily="2" charset="-78"/>
+                <a:ea typeface="Amiri" pitchFamily="2" charset="-78"/>
                 <a:cs typeface="Amiri" pitchFamily="2" charset="-78"/>
               </a:rPr>
               <a:t>نَعَمْ، فِي السَّاعَةِ …</a:t>
@@ -43268,6 +43536,7 @@
                   <a:srgbClr val="1B3B6F"/>
                 </a:solidFill>
                 <a:latin typeface="Amiri" pitchFamily="2" charset="-78"/>
+                <a:ea typeface="Amiri" pitchFamily="2" charset="-78"/>
                 <a:cs typeface="Amiri" pitchFamily="2" charset="-78"/>
               </a:rPr>
               <a:t>شُكْرًا! هَلْ عِنْدَكُمْ رَقْصٌ؟</a:t>
@@ -43436,6 +43705,7 @@
                   <a:srgbClr val="1B3B6F"/>
                 </a:solidFill>
                 <a:latin typeface="Amiri" pitchFamily="2" charset="-78"/>
+                <a:ea typeface="Amiri" pitchFamily="2" charset="-78"/>
                 <a:cs typeface="Amiri" pitchFamily="2" charset="-78"/>
               </a:rPr>
               <a:t>أَهَمُّ عِيدٍ … ، وَ…</a:t>
@@ -43512,6 +43782,7 @@
                   <a:srgbClr val="1B3B6F"/>
                 </a:solidFill>
                 <a:latin typeface="Amiri" pitchFamily="2" charset="-78"/>
+                <a:ea typeface="Amiri" pitchFamily="2" charset="-78"/>
                 <a:cs typeface="Amiri" pitchFamily="2" charset="-78"/>
               </a:rPr>
               <a:t>مَا أَهَمُّ عِيدٍ فِي الجَزَائِرِ؟</a:t>
@@ -43786,6 +44057,7 @@
                   <a:srgbClr val="D4AF37"/>
                 </a:solidFill>
                 <a:latin typeface="Amiri" pitchFamily="2" charset="-78"/>
+                <a:ea typeface="Amiri" pitchFamily="2" charset="-78"/>
                 <a:cs typeface="Amiri" pitchFamily="2" charset="-78"/>
               </a:rPr>
               <a:t>م</a:t>
@@ -44106,6 +44378,7 @@
                   <a:srgbClr val="8A6D1E"/>
                 </a:solidFill>
                 <a:latin typeface="Amiri" pitchFamily="2" charset="-78"/>
+                <a:ea typeface="Amiri" pitchFamily="2" charset="-78"/>
                 <a:cs typeface="Amiri" pitchFamily="2" charset="-78"/>
               </a:rPr>
               <a:t>مَعَ صَدِيقٍ ثُمَّ مَعَ المُدِيرِ</a:t>
@@ -44386,6 +44659,7 @@
                   <a:srgbClr val="1B3B6F"/>
                 </a:solidFill>
                 <a:latin typeface="Amiri" pitchFamily="2" charset="-78"/>
+                <a:ea typeface="Amiri" pitchFamily="2" charset="-78"/>
                 <a:cs typeface="Amiri" pitchFamily="2" charset="-78"/>
               </a:rPr>
               <a:t>كَانَتْ رَائِعَةً! زُرْتُ …</a:t>
@@ -44462,6 +44736,7 @@
                   <a:srgbClr val="1B3B6F"/>
                 </a:solidFill>
                 <a:latin typeface="Amiri" pitchFamily="2" charset="-78"/>
+                <a:ea typeface="Amiri" pitchFamily="2" charset="-78"/>
                 <a:cs typeface="Amiri" pitchFamily="2" charset="-78"/>
               </a:rPr>
               <a:t>(صَدِيقٌ) أَهْلًا! كَيْفَ كَانَتْ رِحْلَتُكَ إِلَى الأُرْدُنِّ؟</a:t>
@@ -44630,6 +44905,7 @@
                   <a:srgbClr val="1B3B6F"/>
                 </a:solidFill>
                 <a:latin typeface="Amiri" pitchFamily="2" charset="-78"/>
+                <a:ea typeface="Amiri" pitchFamily="2" charset="-78"/>
                 <a:cs typeface="Amiri" pitchFamily="2" charset="-78"/>
               </a:rPr>
               <a:t>الأَكْلُ … لٰكِنَّ …</a:t>
@@ -44706,6 +44982,7 @@
                   <a:srgbClr val="1B3B6F"/>
                 </a:solidFill>
                 <a:latin typeface="Amiri" pitchFamily="2" charset="-78"/>
+                <a:ea typeface="Amiri" pitchFamily="2" charset="-78"/>
                 <a:cs typeface="Amiri" pitchFamily="2" charset="-78"/>
               </a:rPr>
               <a:t>وَالأَكْلُ؟</a:t>
@@ -44874,6 +45151,7 @@
                   <a:srgbClr val="1B3B6F"/>
                 </a:solidFill>
                 <a:latin typeface="Amiri" pitchFamily="2" charset="-78"/>
+                <a:ea typeface="Amiri" pitchFamily="2" charset="-78"/>
                 <a:cs typeface="Amiri" pitchFamily="2" charset="-78"/>
               </a:rPr>
               <a:t>مَسَاءَ النُّورِ يَا حَضْرَةَ المُدِيرِ. يَسُرُّنِي …</a:t>
@@ -44953,6 +45231,7 @@
                   <a:srgbClr val="1B3B6F"/>
                 </a:solidFill>
                 <a:latin typeface="Amiri" pitchFamily="2" charset="-78"/>
+                <a:ea typeface="Amiri" pitchFamily="2" charset="-78"/>
                 <a:cs typeface="Amiri" pitchFamily="2" charset="-78"/>
               </a:rPr>
               <a:t>(المُدِيرُ) مَسَاءَ الخَيْرِ. سَمِعْتُ أَنَّكَ تُرِيدُ أَنْ تَتَطَوَّعَ مَعَنَا.</a:t>
@@ -45056,6 +45335,7 @@
                   <a:srgbClr val="1B3B6F"/>
                 </a:solidFill>
                 <a:latin typeface="Amiri" pitchFamily="2" charset="-78"/>
+                <a:ea typeface="Amiri" pitchFamily="2" charset="-78"/>
                 <a:cs typeface="Amiri" pitchFamily="2" charset="-78"/>
               </a:rPr>
               <a:t>أَسْتَطِيعُ أَنْ … ؛ هَلْ يُمْكِنُنِي أَنْ …؟</a:t>
@@ -45132,6 +45412,7 @@
                   <a:srgbClr val="1B3B6F"/>
                 </a:solidFill>
                 <a:latin typeface="Amiri" pitchFamily="2" charset="-78"/>
+                <a:ea typeface="Amiri" pitchFamily="2" charset="-78"/>
                 <a:cs typeface="Amiri" pitchFamily="2" charset="-78"/>
               </a:rPr>
               <a:t>مَا الَّذِي تَسْتَطِيعُ أَنْ تُقَدِّمَهُ؟</a:t>
@@ -45235,6 +45516,7 @@
                   <a:srgbClr val="1B3B6F"/>
                 </a:solidFill>
                 <a:latin typeface="Amiri" pitchFamily="2" charset="-78"/>
+                <a:ea typeface="Amiri" pitchFamily="2" charset="-78"/>
                 <a:cs typeface="Amiri" pitchFamily="2" charset="-78"/>
               </a:rPr>
               <a:t>لِأَنَّ … ؛ وَسَأَطْلُبُ …</a:t>
@@ -45311,6 +45593,7 @@
                   <a:srgbClr val="1B3B6F"/>
                 </a:solidFill>
                 <a:latin typeface="Amiri" pitchFamily="2" charset="-78"/>
+                <a:ea typeface="Amiri" pitchFamily="2" charset="-78"/>
                 <a:cs typeface="Amiri" pitchFamily="2" charset="-78"/>
               </a:rPr>
               <a:t>طَبْعًا. لِمَاذَا يُهِمُّكَ هٰذَا العَمَلُ؟</a:t>
@@ -45485,13 +45768,9 @@
     <a:fontScheme name="Office">
       <a:majorFont>
         <a:latin typeface="Calibri Light" panose="020F0302020204030204"/>
-        <a:ea typeface=""/>
-        <a:cs typeface=""/>
-        <a:font script="Jpan" typeface="游ゴシック Light"/>
-        <a:font script="Hang" typeface="맑은 고딕"/>
-        <a:font script="Hans" typeface="等线 Light"/>
-        <a:font script="Hant" typeface="新細明體"/>
-        <a:font script="Arab" typeface="Times New Roman"/>
+        <a:ea typeface="Amiri" pitchFamily="2" charset="-78"/>
+        <a:cs typeface="Amiri" pitchFamily="2" charset="-78"/>
+        <a:font script="Arab" typeface="Amiri"/>
         <a:font script="Hebr" typeface="Times New Roman"/>
         <a:font script="Thai" typeface="Angsana New"/>
         <a:font script="Ethi" typeface="Nyala"/>
@@ -45537,13 +45816,9 @@
       </a:majorFont>
       <a:minorFont>
         <a:latin typeface="Calibri" panose="020F0502020204030204"/>
-        <a:ea typeface=""/>
-        <a:cs typeface=""/>
-        <a:font script="Jpan" typeface="游ゴシック"/>
-        <a:font script="Hang" typeface="맑은 고딕"/>
-        <a:font script="Hans" typeface="等线"/>
-        <a:font script="Hant" typeface="新細明體"/>
-        <a:font script="Arab" typeface="Arial"/>
+        <a:ea typeface="Amiri" pitchFamily="2" charset="-78"/>
+        <a:cs typeface="Amiri" pitchFamily="2" charset="-78"/>
+        <a:font script="Arab" typeface="Amiri"/>
         <a:font script="Hebr" typeface="Arial"/>
         <a:font script="Thai" typeface="Cordia New"/>
         <a:font script="Ethi" typeface="Nyala"/>
